--- a/src/main/resources/static/image/default/gacha.pptx
+++ b/src/main/resources/static/image/default/gacha.pptx
@@ -155,10 +155,9 @@
           </a:lstStyle>
           <a:p>
             <a:r>
-              <a:rPr kumimoji="1" lang="ja-JP" altLang="en-US" smtClean="0"/>
+              <a:rPr kumimoji="1" lang="ja-JP" altLang="en-US"/>
               <a:t>マスター タイトルの書式設定</a:t>
             </a:r>
-            <a:endParaRPr kumimoji="1" lang="ja-JP" altLang="en-US"/>
           </a:p>
         </p:txBody>
       </p:sp>
@@ -220,10 +219,9 @@
           </a:lstStyle>
           <a:p>
             <a:r>
-              <a:rPr kumimoji="1" lang="ja-JP" altLang="en-US" smtClean="0"/>
+              <a:rPr kumimoji="1" lang="ja-JP" altLang="en-US"/>
               <a:t>マスター サブタイトルの書式設定</a:t>
             </a:r>
-            <a:endParaRPr kumimoji="1" lang="ja-JP" altLang="en-US"/>
           </a:p>
         </p:txBody>
       </p:sp>
@@ -244,7 +242,7 @@
           <a:p>
             <a:fld id="{0E085FA6-3BB9-47BA-8D81-299A75D1B58A}" type="datetimeFigureOut">
               <a:rPr kumimoji="1" lang="ja-JP" altLang="en-US" smtClean="0"/>
-              <a:t>2025/4/1</a:t>
+              <a:t>2026/3/5</a:t>
             </a:fld>
             <a:endParaRPr kumimoji="1" lang="ja-JP" altLang="en-US"/>
           </a:p>
@@ -338,10 +336,9 @@
           <a:lstStyle/>
           <a:p>
             <a:r>
-              <a:rPr kumimoji="1" lang="ja-JP" altLang="en-US" smtClean="0"/>
+              <a:rPr kumimoji="1" lang="ja-JP" altLang="en-US"/>
               <a:t>マスター タイトルの書式設定</a:t>
             </a:r>
-            <a:endParaRPr kumimoji="1" lang="ja-JP" altLang="en-US"/>
           </a:p>
         </p:txBody>
       </p:sp>
@@ -362,70 +359,69 @@
           <a:p>
             <a:pPr lvl="0"/>
             <a:r>
-              <a:rPr kumimoji="1" lang="ja-JP" altLang="en-US" smtClean="0"/>
+              <a:rPr kumimoji="1" lang="ja-JP" altLang="en-US"/>
               <a:t>マスター テキストの書式設定</a:t>
             </a:r>
           </a:p>
           <a:p>
             <a:pPr lvl="1"/>
             <a:r>
-              <a:rPr kumimoji="1" lang="ja-JP" altLang="en-US" smtClean="0"/>
+              <a:rPr kumimoji="1" lang="ja-JP" altLang="en-US"/>
               <a:t>第 </a:t>
             </a:r>
             <a:r>
-              <a:rPr kumimoji="1" lang="en-US" altLang="ja-JP" smtClean="0"/>
+              <a:rPr kumimoji="1" lang="en-US" altLang="ja-JP"/>
               <a:t>2 </a:t>
             </a:r>
             <a:r>
-              <a:rPr kumimoji="1" lang="ja-JP" altLang="en-US" smtClean="0"/>
+              <a:rPr kumimoji="1" lang="ja-JP" altLang="en-US"/>
               <a:t>レベル</a:t>
             </a:r>
           </a:p>
           <a:p>
             <a:pPr lvl="2"/>
             <a:r>
-              <a:rPr kumimoji="1" lang="ja-JP" altLang="en-US" smtClean="0"/>
+              <a:rPr kumimoji="1" lang="ja-JP" altLang="en-US"/>
               <a:t>第 </a:t>
             </a:r>
             <a:r>
-              <a:rPr kumimoji="1" lang="en-US" altLang="ja-JP" smtClean="0"/>
+              <a:rPr kumimoji="1" lang="en-US" altLang="ja-JP"/>
               <a:t>3 </a:t>
             </a:r>
             <a:r>
-              <a:rPr kumimoji="1" lang="ja-JP" altLang="en-US" smtClean="0"/>
+              <a:rPr kumimoji="1" lang="ja-JP" altLang="en-US"/>
               <a:t>レベル</a:t>
             </a:r>
           </a:p>
           <a:p>
             <a:pPr lvl="3"/>
             <a:r>
-              <a:rPr kumimoji="1" lang="ja-JP" altLang="en-US" smtClean="0"/>
+              <a:rPr kumimoji="1" lang="ja-JP" altLang="en-US"/>
               <a:t>第 </a:t>
             </a:r>
             <a:r>
-              <a:rPr kumimoji="1" lang="en-US" altLang="ja-JP" smtClean="0"/>
+              <a:rPr kumimoji="1" lang="en-US" altLang="ja-JP"/>
               <a:t>4 </a:t>
             </a:r>
             <a:r>
-              <a:rPr kumimoji="1" lang="ja-JP" altLang="en-US" smtClean="0"/>
+              <a:rPr kumimoji="1" lang="ja-JP" altLang="en-US"/>
               <a:t>レベル</a:t>
             </a:r>
           </a:p>
           <a:p>
             <a:pPr lvl="4"/>
             <a:r>
-              <a:rPr kumimoji="1" lang="ja-JP" altLang="en-US" smtClean="0"/>
+              <a:rPr kumimoji="1" lang="ja-JP" altLang="en-US"/>
               <a:t>第 </a:t>
             </a:r>
             <a:r>
-              <a:rPr kumimoji="1" lang="en-US" altLang="ja-JP" smtClean="0"/>
+              <a:rPr kumimoji="1" lang="en-US" altLang="ja-JP"/>
               <a:t>5 </a:t>
             </a:r>
             <a:r>
-              <a:rPr kumimoji="1" lang="ja-JP" altLang="en-US" smtClean="0"/>
+              <a:rPr kumimoji="1" lang="ja-JP" altLang="en-US"/>
               <a:t>レベル</a:t>
             </a:r>
-            <a:endParaRPr kumimoji="1" lang="ja-JP" altLang="en-US"/>
           </a:p>
         </p:txBody>
       </p:sp>
@@ -446,7 +442,7 @@
           <a:p>
             <a:fld id="{0E085FA6-3BB9-47BA-8D81-299A75D1B58A}" type="datetimeFigureOut">
               <a:rPr kumimoji="1" lang="ja-JP" altLang="en-US" smtClean="0"/>
-              <a:t>2025/4/1</a:t>
+              <a:t>2026/3/5</a:t>
             </a:fld>
             <a:endParaRPr kumimoji="1" lang="ja-JP" altLang="en-US"/>
           </a:p>
@@ -545,10 +541,9 @@
           <a:lstStyle/>
           <a:p>
             <a:r>
-              <a:rPr kumimoji="1" lang="ja-JP" altLang="en-US" smtClean="0"/>
+              <a:rPr kumimoji="1" lang="ja-JP" altLang="en-US"/>
               <a:t>マスター タイトルの書式設定</a:t>
             </a:r>
-            <a:endParaRPr kumimoji="1" lang="ja-JP" altLang="en-US"/>
           </a:p>
         </p:txBody>
       </p:sp>
@@ -574,70 +569,69 @@
           <a:p>
             <a:pPr lvl="0"/>
             <a:r>
-              <a:rPr kumimoji="1" lang="ja-JP" altLang="en-US" smtClean="0"/>
+              <a:rPr kumimoji="1" lang="ja-JP" altLang="en-US"/>
               <a:t>マスター テキストの書式設定</a:t>
             </a:r>
           </a:p>
           <a:p>
             <a:pPr lvl="1"/>
             <a:r>
-              <a:rPr kumimoji="1" lang="ja-JP" altLang="en-US" smtClean="0"/>
+              <a:rPr kumimoji="1" lang="ja-JP" altLang="en-US"/>
               <a:t>第 </a:t>
             </a:r>
             <a:r>
-              <a:rPr kumimoji="1" lang="en-US" altLang="ja-JP" smtClean="0"/>
+              <a:rPr kumimoji="1" lang="en-US" altLang="ja-JP"/>
               <a:t>2 </a:t>
             </a:r>
             <a:r>
-              <a:rPr kumimoji="1" lang="ja-JP" altLang="en-US" smtClean="0"/>
+              <a:rPr kumimoji="1" lang="ja-JP" altLang="en-US"/>
               <a:t>レベル</a:t>
             </a:r>
           </a:p>
           <a:p>
             <a:pPr lvl="2"/>
             <a:r>
-              <a:rPr kumimoji="1" lang="ja-JP" altLang="en-US" smtClean="0"/>
+              <a:rPr kumimoji="1" lang="ja-JP" altLang="en-US"/>
               <a:t>第 </a:t>
             </a:r>
             <a:r>
-              <a:rPr kumimoji="1" lang="en-US" altLang="ja-JP" smtClean="0"/>
+              <a:rPr kumimoji="1" lang="en-US" altLang="ja-JP"/>
               <a:t>3 </a:t>
             </a:r>
             <a:r>
-              <a:rPr kumimoji="1" lang="ja-JP" altLang="en-US" smtClean="0"/>
+              <a:rPr kumimoji="1" lang="ja-JP" altLang="en-US"/>
               <a:t>レベル</a:t>
             </a:r>
           </a:p>
           <a:p>
             <a:pPr lvl="3"/>
             <a:r>
-              <a:rPr kumimoji="1" lang="ja-JP" altLang="en-US" smtClean="0"/>
+              <a:rPr kumimoji="1" lang="ja-JP" altLang="en-US"/>
               <a:t>第 </a:t>
             </a:r>
             <a:r>
-              <a:rPr kumimoji="1" lang="en-US" altLang="ja-JP" smtClean="0"/>
+              <a:rPr kumimoji="1" lang="en-US" altLang="ja-JP"/>
               <a:t>4 </a:t>
             </a:r>
             <a:r>
-              <a:rPr kumimoji="1" lang="ja-JP" altLang="en-US" smtClean="0"/>
+              <a:rPr kumimoji="1" lang="ja-JP" altLang="en-US"/>
               <a:t>レベル</a:t>
             </a:r>
           </a:p>
           <a:p>
             <a:pPr lvl="4"/>
             <a:r>
-              <a:rPr kumimoji="1" lang="ja-JP" altLang="en-US" smtClean="0"/>
+              <a:rPr kumimoji="1" lang="ja-JP" altLang="en-US"/>
               <a:t>第 </a:t>
             </a:r>
             <a:r>
-              <a:rPr kumimoji="1" lang="en-US" altLang="ja-JP" smtClean="0"/>
+              <a:rPr kumimoji="1" lang="en-US" altLang="ja-JP"/>
               <a:t>5 </a:t>
             </a:r>
             <a:r>
-              <a:rPr kumimoji="1" lang="ja-JP" altLang="en-US" smtClean="0"/>
+              <a:rPr kumimoji="1" lang="ja-JP" altLang="en-US"/>
               <a:t>レベル</a:t>
             </a:r>
-            <a:endParaRPr kumimoji="1" lang="ja-JP" altLang="en-US"/>
           </a:p>
         </p:txBody>
       </p:sp>
@@ -658,7 +652,7 @@
           <a:p>
             <a:fld id="{0E085FA6-3BB9-47BA-8D81-299A75D1B58A}" type="datetimeFigureOut">
               <a:rPr kumimoji="1" lang="ja-JP" altLang="en-US" smtClean="0"/>
-              <a:t>2025/4/1</a:t>
+              <a:t>2026/3/5</a:t>
             </a:fld>
             <a:endParaRPr kumimoji="1" lang="ja-JP" altLang="en-US"/>
           </a:p>
@@ -752,10 +746,9 @@
           <a:lstStyle/>
           <a:p>
             <a:r>
-              <a:rPr kumimoji="1" lang="ja-JP" altLang="en-US" smtClean="0"/>
+              <a:rPr kumimoji="1" lang="ja-JP" altLang="en-US"/>
               <a:t>マスター タイトルの書式設定</a:t>
             </a:r>
-            <a:endParaRPr kumimoji="1" lang="ja-JP" altLang="en-US"/>
           </a:p>
         </p:txBody>
       </p:sp>
@@ -776,70 +769,69 @@
           <a:p>
             <a:pPr lvl="0"/>
             <a:r>
-              <a:rPr kumimoji="1" lang="ja-JP" altLang="en-US" smtClean="0"/>
+              <a:rPr kumimoji="1" lang="ja-JP" altLang="en-US"/>
               <a:t>マスター テキストの書式設定</a:t>
             </a:r>
           </a:p>
           <a:p>
             <a:pPr lvl="1"/>
             <a:r>
-              <a:rPr kumimoji="1" lang="ja-JP" altLang="en-US" smtClean="0"/>
+              <a:rPr kumimoji="1" lang="ja-JP" altLang="en-US"/>
               <a:t>第 </a:t>
             </a:r>
             <a:r>
-              <a:rPr kumimoji="1" lang="en-US" altLang="ja-JP" smtClean="0"/>
+              <a:rPr kumimoji="1" lang="en-US" altLang="ja-JP"/>
               <a:t>2 </a:t>
             </a:r>
             <a:r>
-              <a:rPr kumimoji="1" lang="ja-JP" altLang="en-US" smtClean="0"/>
+              <a:rPr kumimoji="1" lang="ja-JP" altLang="en-US"/>
               <a:t>レベル</a:t>
             </a:r>
           </a:p>
           <a:p>
             <a:pPr lvl="2"/>
             <a:r>
-              <a:rPr kumimoji="1" lang="ja-JP" altLang="en-US" smtClean="0"/>
+              <a:rPr kumimoji="1" lang="ja-JP" altLang="en-US"/>
               <a:t>第 </a:t>
             </a:r>
             <a:r>
-              <a:rPr kumimoji="1" lang="en-US" altLang="ja-JP" smtClean="0"/>
+              <a:rPr kumimoji="1" lang="en-US" altLang="ja-JP"/>
               <a:t>3 </a:t>
             </a:r>
             <a:r>
-              <a:rPr kumimoji="1" lang="ja-JP" altLang="en-US" smtClean="0"/>
+              <a:rPr kumimoji="1" lang="ja-JP" altLang="en-US"/>
               <a:t>レベル</a:t>
             </a:r>
           </a:p>
           <a:p>
             <a:pPr lvl="3"/>
             <a:r>
-              <a:rPr kumimoji="1" lang="ja-JP" altLang="en-US" smtClean="0"/>
+              <a:rPr kumimoji="1" lang="ja-JP" altLang="en-US"/>
               <a:t>第 </a:t>
             </a:r>
             <a:r>
-              <a:rPr kumimoji="1" lang="en-US" altLang="ja-JP" smtClean="0"/>
+              <a:rPr kumimoji="1" lang="en-US" altLang="ja-JP"/>
               <a:t>4 </a:t>
             </a:r>
             <a:r>
-              <a:rPr kumimoji="1" lang="ja-JP" altLang="en-US" smtClean="0"/>
+              <a:rPr kumimoji="1" lang="ja-JP" altLang="en-US"/>
               <a:t>レベル</a:t>
             </a:r>
           </a:p>
           <a:p>
             <a:pPr lvl="4"/>
             <a:r>
-              <a:rPr kumimoji="1" lang="ja-JP" altLang="en-US" smtClean="0"/>
+              <a:rPr kumimoji="1" lang="ja-JP" altLang="en-US"/>
               <a:t>第 </a:t>
             </a:r>
             <a:r>
-              <a:rPr kumimoji="1" lang="en-US" altLang="ja-JP" smtClean="0"/>
+              <a:rPr kumimoji="1" lang="en-US" altLang="ja-JP"/>
               <a:t>5 </a:t>
             </a:r>
             <a:r>
-              <a:rPr kumimoji="1" lang="ja-JP" altLang="en-US" smtClean="0"/>
+              <a:rPr kumimoji="1" lang="ja-JP" altLang="en-US"/>
               <a:t>レベル</a:t>
             </a:r>
-            <a:endParaRPr kumimoji="1" lang="ja-JP" altLang="en-US"/>
           </a:p>
         </p:txBody>
       </p:sp>
@@ -860,7 +852,7 @@
           <a:p>
             <a:fld id="{0E085FA6-3BB9-47BA-8D81-299A75D1B58A}" type="datetimeFigureOut">
               <a:rPr kumimoji="1" lang="ja-JP" altLang="en-US" smtClean="0"/>
-              <a:t>2025/4/1</a:t>
+              <a:t>2026/3/5</a:t>
             </a:fld>
             <a:endParaRPr kumimoji="1" lang="ja-JP" altLang="en-US"/>
           </a:p>
@@ -963,10 +955,9 @@
           </a:lstStyle>
           <a:p>
             <a:r>
-              <a:rPr kumimoji="1" lang="ja-JP" altLang="en-US" smtClean="0"/>
+              <a:rPr kumimoji="1" lang="ja-JP" altLang="en-US"/>
               <a:t>マスター タイトルの書式設定</a:t>
             </a:r>
-            <a:endParaRPr kumimoji="1" lang="ja-JP" altLang="en-US"/>
           </a:p>
         </p:txBody>
       </p:sp>
@@ -1083,7 +1074,7 @@
           <a:p>
             <a:pPr lvl="0"/>
             <a:r>
-              <a:rPr kumimoji="1" lang="ja-JP" altLang="en-US" smtClean="0"/>
+              <a:rPr kumimoji="1" lang="ja-JP" altLang="en-US"/>
               <a:t>マスター テキストの書式設定</a:t>
             </a:r>
           </a:p>
@@ -1106,7 +1097,7 @@
           <a:p>
             <a:fld id="{0E085FA6-3BB9-47BA-8D81-299A75D1B58A}" type="datetimeFigureOut">
               <a:rPr kumimoji="1" lang="ja-JP" altLang="en-US" smtClean="0"/>
-              <a:t>2025/4/1</a:t>
+              <a:t>2026/3/5</a:t>
             </a:fld>
             <a:endParaRPr kumimoji="1" lang="ja-JP" altLang="en-US"/>
           </a:p>
@@ -1200,10 +1191,9 @@
           <a:lstStyle/>
           <a:p>
             <a:r>
-              <a:rPr kumimoji="1" lang="ja-JP" altLang="en-US" smtClean="0"/>
+              <a:rPr kumimoji="1" lang="ja-JP" altLang="en-US"/>
               <a:t>マスター タイトルの書式設定</a:t>
             </a:r>
-            <a:endParaRPr kumimoji="1" lang="ja-JP" altLang="en-US"/>
           </a:p>
         </p:txBody>
       </p:sp>
@@ -1229,70 +1219,69 @@
           <a:p>
             <a:pPr lvl="0"/>
             <a:r>
-              <a:rPr kumimoji="1" lang="ja-JP" altLang="en-US" smtClean="0"/>
+              <a:rPr kumimoji="1" lang="ja-JP" altLang="en-US"/>
               <a:t>マスター テキストの書式設定</a:t>
             </a:r>
           </a:p>
           <a:p>
             <a:pPr lvl="1"/>
             <a:r>
-              <a:rPr kumimoji="1" lang="ja-JP" altLang="en-US" smtClean="0"/>
+              <a:rPr kumimoji="1" lang="ja-JP" altLang="en-US"/>
               <a:t>第 </a:t>
             </a:r>
             <a:r>
-              <a:rPr kumimoji="1" lang="en-US" altLang="ja-JP" smtClean="0"/>
+              <a:rPr kumimoji="1" lang="en-US" altLang="ja-JP"/>
               <a:t>2 </a:t>
             </a:r>
             <a:r>
-              <a:rPr kumimoji="1" lang="ja-JP" altLang="en-US" smtClean="0"/>
+              <a:rPr kumimoji="1" lang="ja-JP" altLang="en-US"/>
               <a:t>レベル</a:t>
             </a:r>
           </a:p>
           <a:p>
             <a:pPr lvl="2"/>
             <a:r>
-              <a:rPr kumimoji="1" lang="ja-JP" altLang="en-US" smtClean="0"/>
+              <a:rPr kumimoji="1" lang="ja-JP" altLang="en-US"/>
               <a:t>第 </a:t>
             </a:r>
             <a:r>
-              <a:rPr kumimoji="1" lang="en-US" altLang="ja-JP" smtClean="0"/>
+              <a:rPr kumimoji="1" lang="en-US" altLang="ja-JP"/>
               <a:t>3 </a:t>
             </a:r>
             <a:r>
-              <a:rPr kumimoji="1" lang="ja-JP" altLang="en-US" smtClean="0"/>
+              <a:rPr kumimoji="1" lang="ja-JP" altLang="en-US"/>
               <a:t>レベル</a:t>
             </a:r>
           </a:p>
           <a:p>
             <a:pPr lvl="3"/>
             <a:r>
-              <a:rPr kumimoji="1" lang="ja-JP" altLang="en-US" smtClean="0"/>
+              <a:rPr kumimoji="1" lang="ja-JP" altLang="en-US"/>
               <a:t>第 </a:t>
             </a:r>
             <a:r>
-              <a:rPr kumimoji="1" lang="en-US" altLang="ja-JP" smtClean="0"/>
+              <a:rPr kumimoji="1" lang="en-US" altLang="ja-JP"/>
               <a:t>4 </a:t>
             </a:r>
             <a:r>
-              <a:rPr kumimoji="1" lang="ja-JP" altLang="en-US" smtClean="0"/>
+              <a:rPr kumimoji="1" lang="ja-JP" altLang="en-US"/>
               <a:t>レベル</a:t>
             </a:r>
           </a:p>
           <a:p>
             <a:pPr lvl="4"/>
             <a:r>
-              <a:rPr kumimoji="1" lang="ja-JP" altLang="en-US" smtClean="0"/>
+              <a:rPr kumimoji="1" lang="ja-JP" altLang="en-US"/>
               <a:t>第 </a:t>
             </a:r>
             <a:r>
-              <a:rPr kumimoji="1" lang="en-US" altLang="ja-JP" smtClean="0"/>
+              <a:rPr kumimoji="1" lang="en-US" altLang="ja-JP"/>
               <a:t>5 </a:t>
             </a:r>
             <a:r>
-              <a:rPr kumimoji="1" lang="ja-JP" altLang="en-US" smtClean="0"/>
+              <a:rPr kumimoji="1" lang="ja-JP" altLang="en-US"/>
               <a:t>レベル</a:t>
             </a:r>
-            <a:endParaRPr kumimoji="1" lang="ja-JP" altLang="en-US"/>
           </a:p>
         </p:txBody>
       </p:sp>
@@ -1318,70 +1307,69 @@
           <a:p>
             <a:pPr lvl="0"/>
             <a:r>
-              <a:rPr kumimoji="1" lang="ja-JP" altLang="en-US" smtClean="0"/>
+              <a:rPr kumimoji="1" lang="ja-JP" altLang="en-US"/>
               <a:t>マスター テキストの書式設定</a:t>
             </a:r>
           </a:p>
           <a:p>
             <a:pPr lvl="1"/>
             <a:r>
-              <a:rPr kumimoji="1" lang="ja-JP" altLang="en-US" smtClean="0"/>
+              <a:rPr kumimoji="1" lang="ja-JP" altLang="en-US"/>
               <a:t>第 </a:t>
             </a:r>
             <a:r>
-              <a:rPr kumimoji="1" lang="en-US" altLang="ja-JP" smtClean="0"/>
+              <a:rPr kumimoji="1" lang="en-US" altLang="ja-JP"/>
               <a:t>2 </a:t>
             </a:r>
             <a:r>
-              <a:rPr kumimoji="1" lang="ja-JP" altLang="en-US" smtClean="0"/>
+              <a:rPr kumimoji="1" lang="ja-JP" altLang="en-US"/>
               <a:t>レベル</a:t>
             </a:r>
           </a:p>
           <a:p>
             <a:pPr lvl="2"/>
             <a:r>
-              <a:rPr kumimoji="1" lang="ja-JP" altLang="en-US" smtClean="0"/>
+              <a:rPr kumimoji="1" lang="ja-JP" altLang="en-US"/>
               <a:t>第 </a:t>
             </a:r>
             <a:r>
-              <a:rPr kumimoji="1" lang="en-US" altLang="ja-JP" smtClean="0"/>
+              <a:rPr kumimoji="1" lang="en-US" altLang="ja-JP"/>
               <a:t>3 </a:t>
             </a:r>
             <a:r>
-              <a:rPr kumimoji="1" lang="ja-JP" altLang="en-US" smtClean="0"/>
+              <a:rPr kumimoji="1" lang="ja-JP" altLang="en-US"/>
               <a:t>レベル</a:t>
             </a:r>
           </a:p>
           <a:p>
             <a:pPr lvl="3"/>
             <a:r>
-              <a:rPr kumimoji="1" lang="ja-JP" altLang="en-US" smtClean="0"/>
+              <a:rPr kumimoji="1" lang="ja-JP" altLang="en-US"/>
               <a:t>第 </a:t>
             </a:r>
             <a:r>
-              <a:rPr kumimoji="1" lang="en-US" altLang="ja-JP" smtClean="0"/>
+              <a:rPr kumimoji="1" lang="en-US" altLang="ja-JP"/>
               <a:t>4 </a:t>
             </a:r>
             <a:r>
-              <a:rPr kumimoji="1" lang="ja-JP" altLang="en-US" smtClean="0"/>
+              <a:rPr kumimoji="1" lang="ja-JP" altLang="en-US"/>
               <a:t>レベル</a:t>
             </a:r>
           </a:p>
           <a:p>
             <a:pPr lvl="4"/>
             <a:r>
-              <a:rPr kumimoji="1" lang="ja-JP" altLang="en-US" smtClean="0"/>
+              <a:rPr kumimoji="1" lang="ja-JP" altLang="en-US"/>
               <a:t>第 </a:t>
             </a:r>
             <a:r>
-              <a:rPr kumimoji="1" lang="en-US" altLang="ja-JP" smtClean="0"/>
+              <a:rPr kumimoji="1" lang="en-US" altLang="ja-JP"/>
               <a:t>5 </a:t>
             </a:r>
             <a:r>
-              <a:rPr kumimoji="1" lang="ja-JP" altLang="en-US" smtClean="0"/>
+              <a:rPr kumimoji="1" lang="ja-JP" altLang="en-US"/>
               <a:t>レベル</a:t>
             </a:r>
-            <a:endParaRPr kumimoji="1" lang="ja-JP" altLang="en-US"/>
           </a:p>
         </p:txBody>
       </p:sp>
@@ -1402,7 +1390,7 @@
           <a:p>
             <a:fld id="{0E085FA6-3BB9-47BA-8D81-299A75D1B58A}" type="datetimeFigureOut">
               <a:rPr kumimoji="1" lang="ja-JP" altLang="en-US" smtClean="0"/>
-              <a:t>2025/4/1</a:t>
+              <a:t>2026/3/5</a:t>
             </a:fld>
             <a:endParaRPr kumimoji="1" lang="ja-JP" altLang="en-US"/>
           </a:p>
@@ -1501,10 +1489,9 @@
           <a:lstStyle/>
           <a:p>
             <a:r>
-              <a:rPr kumimoji="1" lang="ja-JP" altLang="en-US" smtClean="0"/>
+              <a:rPr kumimoji="1" lang="ja-JP" altLang="en-US"/>
               <a:t>マスター タイトルの書式設定</a:t>
             </a:r>
-            <a:endParaRPr kumimoji="1" lang="ja-JP" altLang="en-US"/>
           </a:p>
         </p:txBody>
       </p:sp>
@@ -1567,7 +1554,7 @@
           <a:p>
             <a:pPr lvl="0"/>
             <a:r>
-              <a:rPr kumimoji="1" lang="ja-JP" altLang="en-US" smtClean="0"/>
+              <a:rPr kumimoji="1" lang="ja-JP" altLang="en-US"/>
               <a:t>マスター テキストの書式設定</a:t>
             </a:r>
           </a:p>
@@ -1595,70 +1582,69 @@
           <a:p>
             <a:pPr lvl="0"/>
             <a:r>
-              <a:rPr kumimoji="1" lang="ja-JP" altLang="en-US" smtClean="0"/>
+              <a:rPr kumimoji="1" lang="ja-JP" altLang="en-US"/>
               <a:t>マスター テキストの書式設定</a:t>
             </a:r>
           </a:p>
           <a:p>
             <a:pPr lvl="1"/>
             <a:r>
-              <a:rPr kumimoji="1" lang="ja-JP" altLang="en-US" smtClean="0"/>
+              <a:rPr kumimoji="1" lang="ja-JP" altLang="en-US"/>
               <a:t>第 </a:t>
             </a:r>
             <a:r>
-              <a:rPr kumimoji="1" lang="en-US" altLang="ja-JP" smtClean="0"/>
+              <a:rPr kumimoji="1" lang="en-US" altLang="ja-JP"/>
               <a:t>2 </a:t>
             </a:r>
             <a:r>
-              <a:rPr kumimoji="1" lang="ja-JP" altLang="en-US" smtClean="0"/>
+              <a:rPr kumimoji="1" lang="ja-JP" altLang="en-US"/>
               <a:t>レベル</a:t>
             </a:r>
           </a:p>
           <a:p>
             <a:pPr lvl="2"/>
             <a:r>
-              <a:rPr kumimoji="1" lang="ja-JP" altLang="en-US" smtClean="0"/>
+              <a:rPr kumimoji="1" lang="ja-JP" altLang="en-US"/>
               <a:t>第 </a:t>
             </a:r>
             <a:r>
-              <a:rPr kumimoji="1" lang="en-US" altLang="ja-JP" smtClean="0"/>
+              <a:rPr kumimoji="1" lang="en-US" altLang="ja-JP"/>
               <a:t>3 </a:t>
             </a:r>
             <a:r>
-              <a:rPr kumimoji="1" lang="ja-JP" altLang="en-US" smtClean="0"/>
+              <a:rPr kumimoji="1" lang="ja-JP" altLang="en-US"/>
               <a:t>レベル</a:t>
             </a:r>
           </a:p>
           <a:p>
             <a:pPr lvl="3"/>
             <a:r>
-              <a:rPr kumimoji="1" lang="ja-JP" altLang="en-US" smtClean="0"/>
+              <a:rPr kumimoji="1" lang="ja-JP" altLang="en-US"/>
               <a:t>第 </a:t>
             </a:r>
             <a:r>
-              <a:rPr kumimoji="1" lang="en-US" altLang="ja-JP" smtClean="0"/>
+              <a:rPr kumimoji="1" lang="en-US" altLang="ja-JP"/>
               <a:t>4 </a:t>
             </a:r>
             <a:r>
-              <a:rPr kumimoji="1" lang="ja-JP" altLang="en-US" smtClean="0"/>
+              <a:rPr kumimoji="1" lang="ja-JP" altLang="en-US"/>
               <a:t>レベル</a:t>
             </a:r>
           </a:p>
           <a:p>
             <a:pPr lvl="4"/>
             <a:r>
-              <a:rPr kumimoji="1" lang="ja-JP" altLang="en-US" smtClean="0"/>
+              <a:rPr kumimoji="1" lang="ja-JP" altLang="en-US"/>
               <a:t>第 </a:t>
             </a:r>
             <a:r>
-              <a:rPr kumimoji="1" lang="en-US" altLang="ja-JP" smtClean="0"/>
+              <a:rPr kumimoji="1" lang="en-US" altLang="ja-JP"/>
               <a:t>5 </a:t>
             </a:r>
             <a:r>
-              <a:rPr kumimoji="1" lang="ja-JP" altLang="en-US" smtClean="0"/>
+              <a:rPr kumimoji="1" lang="ja-JP" altLang="en-US"/>
               <a:t>レベル</a:t>
             </a:r>
-            <a:endParaRPr kumimoji="1" lang="ja-JP" altLang="en-US"/>
           </a:p>
         </p:txBody>
       </p:sp>
@@ -1721,7 +1707,7 @@
           <a:p>
             <a:pPr lvl="0"/>
             <a:r>
-              <a:rPr kumimoji="1" lang="ja-JP" altLang="en-US" smtClean="0"/>
+              <a:rPr kumimoji="1" lang="ja-JP" altLang="en-US"/>
               <a:t>マスター テキストの書式設定</a:t>
             </a:r>
           </a:p>
@@ -1749,70 +1735,69 @@
           <a:p>
             <a:pPr lvl="0"/>
             <a:r>
-              <a:rPr kumimoji="1" lang="ja-JP" altLang="en-US" smtClean="0"/>
+              <a:rPr kumimoji="1" lang="ja-JP" altLang="en-US"/>
               <a:t>マスター テキストの書式設定</a:t>
             </a:r>
           </a:p>
           <a:p>
             <a:pPr lvl="1"/>
             <a:r>
-              <a:rPr kumimoji="1" lang="ja-JP" altLang="en-US" smtClean="0"/>
+              <a:rPr kumimoji="1" lang="ja-JP" altLang="en-US"/>
               <a:t>第 </a:t>
             </a:r>
             <a:r>
-              <a:rPr kumimoji="1" lang="en-US" altLang="ja-JP" smtClean="0"/>
+              <a:rPr kumimoji="1" lang="en-US" altLang="ja-JP"/>
               <a:t>2 </a:t>
             </a:r>
             <a:r>
-              <a:rPr kumimoji="1" lang="ja-JP" altLang="en-US" smtClean="0"/>
+              <a:rPr kumimoji="1" lang="ja-JP" altLang="en-US"/>
               <a:t>レベル</a:t>
             </a:r>
           </a:p>
           <a:p>
             <a:pPr lvl="2"/>
             <a:r>
-              <a:rPr kumimoji="1" lang="ja-JP" altLang="en-US" smtClean="0"/>
+              <a:rPr kumimoji="1" lang="ja-JP" altLang="en-US"/>
               <a:t>第 </a:t>
             </a:r>
             <a:r>
-              <a:rPr kumimoji="1" lang="en-US" altLang="ja-JP" smtClean="0"/>
+              <a:rPr kumimoji="1" lang="en-US" altLang="ja-JP"/>
               <a:t>3 </a:t>
             </a:r>
             <a:r>
-              <a:rPr kumimoji="1" lang="ja-JP" altLang="en-US" smtClean="0"/>
+              <a:rPr kumimoji="1" lang="ja-JP" altLang="en-US"/>
               <a:t>レベル</a:t>
             </a:r>
           </a:p>
           <a:p>
             <a:pPr lvl="3"/>
             <a:r>
-              <a:rPr kumimoji="1" lang="ja-JP" altLang="en-US" smtClean="0"/>
+              <a:rPr kumimoji="1" lang="ja-JP" altLang="en-US"/>
               <a:t>第 </a:t>
             </a:r>
             <a:r>
-              <a:rPr kumimoji="1" lang="en-US" altLang="ja-JP" smtClean="0"/>
+              <a:rPr kumimoji="1" lang="en-US" altLang="ja-JP"/>
               <a:t>4 </a:t>
             </a:r>
             <a:r>
-              <a:rPr kumimoji="1" lang="ja-JP" altLang="en-US" smtClean="0"/>
+              <a:rPr kumimoji="1" lang="ja-JP" altLang="en-US"/>
               <a:t>レベル</a:t>
             </a:r>
           </a:p>
           <a:p>
             <a:pPr lvl="4"/>
             <a:r>
-              <a:rPr kumimoji="1" lang="ja-JP" altLang="en-US" smtClean="0"/>
+              <a:rPr kumimoji="1" lang="ja-JP" altLang="en-US"/>
               <a:t>第 </a:t>
             </a:r>
             <a:r>
-              <a:rPr kumimoji="1" lang="en-US" altLang="ja-JP" smtClean="0"/>
+              <a:rPr kumimoji="1" lang="en-US" altLang="ja-JP"/>
               <a:t>5 </a:t>
             </a:r>
             <a:r>
-              <a:rPr kumimoji="1" lang="ja-JP" altLang="en-US" smtClean="0"/>
+              <a:rPr kumimoji="1" lang="ja-JP" altLang="en-US"/>
               <a:t>レベル</a:t>
             </a:r>
-            <a:endParaRPr kumimoji="1" lang="ja-JP" altLang="en-US"/>
           </a:p>
         </p:txBody>
       </p:sp>
@@ -1833,7 +1818,7 @@
           <a:p>
             <a:fld id="{0E085FA6-3BB9-47BA-8D81-299A75D1B58A}" type="datetimeFigureOut">
               <a:rPr kumimoji="1" lang="ja-JP" altLang="en-US" smtClean="0"/>
-              <a:t>2025/4/1</a:t>
+              <a:t>2026/3/5</a:t>
             </a:fld>
             <a:endParaRPr kumimoji="1" lang="ja-JP" altLang="en-US"/>
           </a:p>
@@ -1927,10 +1912,9 @@
           <a:lstStyle/>
           <a:p>
             <a:r>
-              <a:rPr kumimoji="1" lang="ja-JP" altLang="en-US" smtClean="0"/>
+              <a:rPr kumimoji="1" lang="ja-JP" altLang="en-US"/>
               <a:t>マスター タイトルの書式設定</a:t>
             </a:r>
-            <a:endParaRPr kumimoji="1" lang="ja-JP" altLang="en-US"/>
           </a:p>
         </p:txBody>
       </p:sp>
@@ -1951,7 +1935,7 @@
           <a:p>
             <a:fld id="{0E085FA6-3BB9-47BA-8D81-299A75D1B58A}" type="datetimeFigureOut">
               <a:rPr kumimoji="1" lang="ja-JP" altLang="en-US" smtClean="0"/>
-              <a:t>2025/4/1</a:t>
+              <a:t>2026/3/5</a:t>
             </a:fld>
             <a:endParaRPr kumimoji="1" lang="ja-JP" altLang="en-US"/>
           </a:p>
@@ -2046,7 +2030,7 @@
           <a:p>
             <a:fld id="{0E085FA6-3BB9-47BA-8D81-299A75D1B58A}" type="datetimeFigureOut">
               <a:rPr kumimoji="1" lang="ja-JP" altLang="en-US" smtClean="0"/>
-              <a:t>2025/4/1</a:t>
+              <a:t>2026/3/5</a:t>
             </a:fld>
             <a:endParaRPr kumimoji="1" lang="ja-JP" altLang="en-US"/>
           </a:p>
@@ -2149,10 +2133,9 @@
           </a:lstStyle>
           <a:p>
             <a:r>
-              <a:rPr kumimoji="1" lang="ja-JP" altLang="en-US" smtClean="0"/>
+              <a:rPr kumimoji="1" lang="ja-JP" altLang="en-US"/>
               <a:t>マスター タイトルの書式設定</a:t>
             </a:r>
-            <a:endParaRPr kumimoji="1" lang="ja-JP" altLang="en-US"/>
           </a:p>
         </p:txBody>
       </p:sp>
@@ -2206,70 +2189,69 @@
           <a:p>
             <a:pPr lvl="0"/>
             <a:r>
-              <a:rPr kumimoji="1" lang="ja-JP" altLang="en-US" smtClean="0"/>
+              <a:rPr kumimoji="1" lang="ja-JP" altLang="en-US"/>
               <a:t>マスター テキストの書式設定</a:t>
             </a:r>
           </a:p>
           <a:p>
             <a:pPr lvl="1"/>
             <a:r>
-              <a:rPr kumimoji="1" lang="ja-JP" altLang="en-US" smtClean="0"/>
+              <a:rPr kumimoji="1" lang="ja-JP" altLang="en-US"/>
               <a:t>第 </a:t>
             </a:r>
             <a:r>
-              <a:rPr kumimoji="1" lang="en-US" altLang="ja-JP" smtClean="0"/>
+              <a:rPr kumimoji="1" lang="en-US" altLang="ja-JP"/>
               <a:t>2 </a:t>
             </a:r>
             <a:r>
-              <a:rPr kumimoji="1" lang="ja-JP" altLang="en-US" smtClean="0"/>
+              <a:rPr kumimoji="1" lang="ja-JP" altLang="en-US"/>
               <a:t>レベル</a:t>
             </a:r>
           </a:p>
           <a:p>
             <a:pPr lvl="2"/>
             <a:r>
-              <a:rPr kumimoji="1" lang="ja-JP" altLang="en-US" smtClean="0"/>
+              <a:rPr kumimoji="1" lang="ja-JP" altLang="en-US"/>
               <a:t>第 </a:t>
             </a:r>
             <a:r>
-              <a:rPr kumimoji="1" lang="en-US" altLang="ja-JP" smtClean="0"/>
+              <a:rPr kumimoji="1" lang="en-US" altLang="ja-JP"/>
               <a:t>3 </a:t>
             </a:r>
             <a:r>
-              <a:rPr kumimoji="1" lang="ja-JP" altLang="en-US" smtClean="0"/>
+              <a:rPr kumimoji="1" lang="ja-JP" altLang="en-US"/>
               <a:t>レベル</a:t>
             </a:r>
           </a:p>
           <a:p>
             <a:pPr lvl="3"/>
             <a:r>
-              <a:rPr kumimoji="1" lang="ja-JP" altLang="en-US" smtClean="0"/>
+              <a:rPr kumimoji="1" lang="ja-JP" altLang="en-US"/>
               <a:t>第 </a:t>
             </a:r>
             <a:r>
-              <a:rPr kumimoji="1" lang="en-US" altLang="ja-JP" smtClean="0"/>
+              <a:rPr kumimoji="1" lang="en-US" altLang="ja-JP"/>
               <a:t>4 </a:t>
             </a:r>
             <a:r>
-              <a:rPr kumimoji="1" lang="ja-JP" altLang="en-US" smtClean="0"/>
+              <a:rPr kumimoji="1" lang="ja-JP" altLang="en-US"/>
               <a:t>レベル</a:t>
             </a:r>
           </a:p>
           <a:p>
             <a:pPr lvl="4"/>
             <a:r>
-              <a:rPr kumimoji="1" lang="ja-JP" altLang="en-US" smtClean="0"/>
+              <a:rPr kumimoji="1" lang="ja-JP" altLang="en-US"/>
               <a:t>第 </a:t>
             </a:r>
             <a:r>
-              <a:rPr kumimoji="1" lang="en-US" altLang="ja-JP" smtClean="0"/>
+              <a:rPr kumimoji="1" lang="en-US" altLang="ja-JP"/>
               <a:t>5 </a:t>
             </a:r>
             <a:r>
-              <a:rPr kumimoji="1" lang="ja-JP" altLang="en-US" smtClean="0"/>
+              <a:rPr kumimoji="1" lang="ja-JP" altLang="en-US"/>
               <a:t>レベル</a:t>
             </a:r>
-            <a:endParaRPr kumimoji="1" lang="ja-JP" altLang="en-US"/>
           </a:p>
         </p:txBody>
       </p:sp>
@@ -2332,7 +2314,7 @@
           <a:p>
             <a:pPr lvl="0"/>
             <a:r>
-              <a:rPr kumimoji="1" lang="ja-JP" altLang="en-US" smtClean="0"/>
+              <a:rPr kumimoji="1" lang="ja-JP" altLang="en-US"/>
               <a:t>マスター テキストの書式設定</a:t>
             </a:r>
           </a:p>
@@ -2355,7 +2337,7 @@
           <a:p>
             <a:fld id="{0E085FA6-3BB9-47BA-8D81-299A75D1B58A}" type="datetimeFigureOut">
               <a:rPr kumimoji="1" lang="ja-JP" altLang="en-US" smtClean="0"/>
-              <a:t>2025/4/1</a:t>
+              <a:t>2026/3/5</a:t>
             </a:fld>
             <a:endParaRPr kumimoji="1" lang="ja-JP" altLang="en-US"/>
           </a:p>
@@ -2458,10 +2440,9 @@
           </a:lstStyle>
           <a:p>
             <a:r>
-              <a:rPr kumimoji="1" lang="ja-JP" altLang="en-US" smtClean="0"/>
+              <a:rPr kumimoji="1" lang="ja-JP" altLang="en-US"/>
               <a:t>マスター タイトルの書式設定</a:t>
             </a:r>
-            <a:endParaRPr kumimoji="1" lang="ja-JP" altLang="en-US"/>
           </a:p>
         </p:txBody>
       </p:sp>
@@ -2585,7 +2566,7 @@
           <a:p>
             <a:pPr lvl="0"/>
             <a:r>
-              <a:rPr kumimoji="1" lang="ja-JP" altLang="en-US" smtClean="0"/>
+              <a:rPr kumimoji="1" lang="ja-JP" altLang="en-US"/>
               <a:t>マスター テキストの書式設定</a:t>
             </a:r>
           </a:p>
@@ -2608,7 +2589,7 @@
           <a:p>
             <a:fld id="{0E085FA6-3BB9-47BA-8D81-299A75D1B58A}" type="datetimeFigureOut">
               <a:rPr kumimoji="1" lang="ja-JP" altLang="en-US" smtClean="0"/>
-              <a:t>2025/4/1</a:t>
+              <a:t>2026/3/5</a:t>
             </a:fld>
             <a:endParaRPr kumimoji="1" lang="ja-JP" altLang="en-US"/>
           </a:p>
@@ -2717,10 +2698,9 @@
           <a:lstStyle/>
           <a:p>
             <a:r>
-              <a:rPr kumimoji="1" lang="ja-JP" altLang="en-US" smtClean="0"/>
+              <a:rPr kumimoji="1" lang="ja-JP" altLang="en-US"/>
               <a:t>マスター タイトルの書式設定</a:t>
             </a:r>
-            <a:endParaRPr kumimoji="1" lang="ja-JP" altLang="en-US"/>
           </a:p>
         </p:txBody>
       </p:sp>
@@ -2751,70 +2731,69 @@
           <a:p>
             <a:pPr lvl="0"/>
             <a:r>
-              <a:rPr kumimoji="1" lang="ja-JP" altLang="en-US" smtClean="0"/>
+              <a:rPr kumimoji="1" lang="ja-JP" altLang="en-US"/>
               <a:t>マスター テキストの書式設定</a:t>
             </a:r>
           </a:p>
           <a:p>
             <a:pPr lvl="1"/>
             <a:r>
-              <a:rPr kumimoji="1" lang="ja-JP" altLang="en-US" smtClean="0"/>
+              <a:rPr kumimoji="1" lang="ja-JP" altLang="en-US"/>
               <a:t>第 </a:t>
             </a:r>
             <a:r>
-              <a:rPr kumimoji="1" lang="en-US" altLang="ja-JP" smtClean="0"/>
+              <a:rPr kumimoji="1" lang="en-US" altLang="ja-JP"/>
               <a:t>2 </a:t>
             </a:r>
             <a:r>
-              <a:rPr kumimoji="1" lang="ja-JP" altLang="en-US" smtClean="0"/>
+              <a:rPr kumimoji="1" lang="ja-JP" altLang="en-US"/>
               <a:t>レベル</a:t>
             </a:r>
           </a:p>
           <a:p>
             <a:pPr lvl="2"/>
             <a:r>
-              <a:rPr kumimoji="1" lang="ja-JP" altLang="en-US" smtClean="0"/>
+              <a:rPr kumimoji="1" lang="ja-JP" altLang="en-US"/>
               <a:t>第 </a:t>
             </a:r>
             <a:r>
-              <a:rPr kumimoji="1" lang="en-US" altLang="ja-JP" smtClean="0"/>
+              <a:rPr kumimoji="1" lang="en-US" altLang="ja-JP"/>
               <a:t>3 </a:t>
             </a:r>
             <a:r>
-              <a:rPr kumimoji="1" lang="ja-JP" altLang="en-US" smtClean="0"/>
+              <a:rPr kumimoji="1" lang="ja-JP" altLang="en-US"/>
               <a:t>レベル</a:t>
             </a:r>
           </a:p>
           <a:p>
             <a:pPr lvl="3"/>
             <a:r>
-              <a:rPr kumimoji="1" lang="ja-JP" altLang="en-US" smtClean="0"/>
+              <a:rPr kumimoji="1" lang="ja-JP" altLang="en-US"/>
               <a:t>第 </a:t>
             </a:r>
             <a:r>
-              <a:rPr kumimoji="1" lang="en-US" altLang="ja-JP" smtClean="0"/>
+              <a:rPr kumimoji="1" lang="en-US" altLang="ja-JP"/>
               <a:t>4 </a:t>
             </a:r>
             <a:r>
-              <a:rPr kumimoji="1" lang="ja-JP" altLang="en-US" smtClean="0"/>
+              <a:rPr kumimoji="1" lang="ja-JP" altLang="en-US"/>
               <a:t>レベル</a:t>
             </a:r>
           </a:p>
           <a:p>
             <a:pPr lvl="4"/>
             <a:r>
-              <a:rPr kumimoji="1" lang="ja-JP" altLang="en-US" smtClean="0"/>
+              <a:rPr kumimoji="1" lang="ja-JP" altLang="en-US"/>
               <a:t>第 </a:t>
             </a:r>
             <a:r>
-              <a:rPr kumimoji="1" lang="en-US" altLang="ja-JP" smtClean="0"/>
+              <a:rPr kumimoji="1" lang="en-US" altLang="ja-JP"/>
               <a:t>5 </a:t>
             </a:r>
             <a:r>
-              <a:rPr kumimoji="1" lang="ja-JP" altLang="en-US" smtClean="0"/>
+              <a:rPr kumimoji="1" lang="ja-JP" altLang="en-US"/>
               <a:t>レベル</a:t>
             </a:r>
-            <a:endParaRPr kumimoji="1" lang="ja-JP" altLang="en-US"/>
           </a:p>
         </p:txBody>
       </p:sp>
@@ -2853,7 +2832,7 @@
           <a:p>
             <a:fld id="{0E085FA6-3BB9-47BA-8D81-299A75D1B58A}" type="datetimeFigureOut">
               <a:rPr kumimoji="1" lang="ja-JP" altLang="en-US" smtClean="0"/>
-              <a:t>2025/4/1</a:t>
+              <a:t>2026/3/5</a:t>
             </a:fld>
             <a:endParaRPr kumimoji="1" lang="ja-JP" altLang="en-US"/>
           </a:p>
@@ -3272,9 +3251,7 @@
           <a:prstGeom prst="rect">
             <a:avLst/>
           </a:prstGeom>
-          <a:solidFill>
-            <a:srgbClr val="FFFFFF"/>
-          </a:solidFill>
+          <a:noFill/>
           <a:ln>
             <a:solidFill>
               <a:schemeClr val="tx1"/>
@@ -3320,9 +3297,7 @@
           <a:prstGeom prst="rect">
             <a:avLst/>
           </a:prstGeom>
-          <a:solidFill>
-            <a:srgbClr val="FFFFFF"/>
-          </a:solidFill>
+          <a:noFill/>
           <a:ln>
             <a:solidFill>
               <a:schemeClr val="tx1"/>
@@ -3368,9 +3343,7 @@
           <a:prstGeom prst="rect">
             <a:avLst/>
           </a:prstGeom>
-          <a:solidFill>
-            <a:srgbClr val="FFFFFF"/>
-          </a:solidFill>
+          <a:noFill/>
           <a:ln>
             <a:solidFill>
               <a:schemeClr val="tx1"/>
@@ -3416,9 +3389,7 @@
           <a:prstGeom prst="rect">
             <a:avLst/>
           </a:prstGeom>
-          <a:solidFill>
-            <a:srgbClr val="FFFFFF"/>
-          </a:solidFill>
+          <a:noFill/>
           <a:ln>
             <a:solidFill>
               <a:schemeClr val="tx1"/>
@@ -3464,9 +3435,7 @@
           <a:prstGeom prst="rect">
             <a:avLst/>
           </a:prstGeom>
-          <a:solidFill>
-            <a:srgbClr val="FFFFFF"/>
-          </a:solidFill>
+          <a:noFill/>
           <a:ln>
             <a:solidFill>
               <a:schemeClr val="tx1"/>
@@ -4638,9 +4607,7 @@
           <a:prstGeom prst="rect">
             <a:avLst/>
           </a:prstGeom>
-          <a:solidFill>
-            <a:srgbClr val="FFFFFF"/>
-          </a:solidFill>
+          <a:noFill/>
           <a:ln>
             <a:solidFill>
               <a:schemeClr val="tx1"/>
@@ -4794,9 +4761,7 @@
           <a:prstGeom prst="rect">
             <a:avLst/>
           </a:prstGeom>
-          <a:solidFill>
-            <a:srgbClr val="FFFFFF"/>
-          </a:solidFill>
+          <a:noFill/>
           <a:ln>
             <a:solidFill>
               <a:schemeClr val="tx1"/>

--- a/src/main/resources/static/image/default/gacha.pptx
+++ b/src/main/resources/static/image/default/gacha.pptx
@@ -242,7 +242,7 @@
           <a:p>
             <a:fld id="{0E085FA6-3BB9-47BA-8D81-299A75D1B58A}" type="datetimeFigureOut">
               <a:rPr kumimoji="1" lang="ja-JP" altLang="en-US" smtClean="0"/>
-              <a:t>2026/3/5</a:t>
+              <a:t>2026/3/12</a:t>
             </a:fld>
             <a:endParaRPr kumimoji="1" lang="ja-JP" altLang="en-US"/>
           </a:p>
@@ -442,7 +442,7 @@
           <a:p>
             <a:fld id="{0E085FA6-3BB9-47BA-8D81-299A75D1B58A}" type="datetimeFigureOut">
               <a:rPr kumimoji="1" lang="ja-JP" altLang="en-US" smtClean="0"/>
-              <a:t>2026/3/5</a:t>
+              <a:t>2026/3/12</a:t>
             </a:fld>
             <a:endParaRPr kumimoji="1" lang="ja-JP" altLang="en-US"/>
           </a:p>
@@ -652,7 +652,7 @@
           <a:p>
             <a:fld id="{0E085FA6-3BB9-47BA-8D81-299A75D1B58A}" type="datetimeFigureOut">
               <a:rPr kumimoji="1" lang="ja-JP" altLang="en-US" smtClean="0"/>
-              <a:t>2026/3/5</a:t>
+              <a:t>2026/3/12</a:t>
             </a:fld>
             <a:endParaRPr kumimoji="1" lang="ja-JP" altLang="en-US"/>
           </a:p>
@@ -852,7 +852,7 @@
           <a:p>
             <a:fld id="{0E085FA6-3BB9-47BA-8D81-299A75D1B58A}" type="datetimeFigureOut">
               <a:rPr kumimoji="1" lang="ja-JP" altLang="en-US" smtClean="0"/>
-              <a:t>2026/3/5</a:t>
+              <a:t>2026/3/12</a:t>
             </a:fld>
             <a:endParaRPr kumimoji="1" lang="ja-JP" altLang="en-US"/>
           </a:p>
@@ -1097,7 +1097,7 @@
           <a:p>
             <a:fld id="{0E085FA6-3BB9-47BA-8D81-299A75D1B58A}" type="datetimeFigureOut">
               <a:rPr kumimoji="1" lang="ja-JP" altLang="en-US" smtClean="0"/>
-              <a:t>2026/3/5</a:t>
+              <a:t>2026/3/12</a:t>
             </a:fld>
             <a:endParaRPr kumimoji="1" lang="ja-JP" altLang="en-US"/>
           </a:p>
@@ -1390,7 +1390,7 @@
           <a:p>
             <a:fld id="{0E085FA6-3BB9-47BA-8D81-299A75D1B58A}" type="datetimeFigureOut">
               <a:rPr kumimoji="1" lang="ja-JP" altLang="en-US" smtClean="0"/>
-              <a:t>2026/3/5</a:t>
+              <a:t>2026/3/12</a:t>
             </a:fld>
             <a:endParaRPr kumimoji="1" lang="ja-JP" altLang="en-US"/>
           </a:p>
@@ -1818,7 +1818,7 @@
           <a:p>
             <a:fld id="{0E085FA6-3BB9-47BA-8D81-299A75D1B58A}" type="datetimeFigureOut">
               <a:rPr kumimoji="1" lang="ja-JP" altLang="en-US" smtClean="0"/>
-              <a:t>2026/3/5</a:t>
+              <a:t>2026/3/12</a:t>
             </a:fld>
             <a:endParaRPr kumimoji="1" lang="ja-JP" altLang="en-US"/>
           </a:p>
@@ -1935,7 +1935,7 @@
           <a:p>
             <a:fld id="{0E085FA6-3BB9-47BA-8D81-299A75D1B58A}" type="datetimeFigureOut">
               <a:rPr kumimoji="1" lang="ja-JP" altLang="en-US" smtClean="0"/>
-              <a:t>2026/3/5</a:t>
+              <a:t>2026/3/12</a:t>
             </a:fld>
             <a:endParaRPr kumimoji="1" lang="ja-JP" altLang="en-US"/>
           </a:p>
@@ -2030,7 +2030,7 @@
           <a:p>
             <a:fld id="{0E085FA6-3BB9-47BA-8D81-299A75D1B58A}" type="datetimeFigureOut">
               <a:rPr kumimoji="1" lang="ja-JP" altLang="en-US" smtClean="0"/>
-              <a:t>2026/3/5</a:t>
+              <a:t>2026/3/12</a:t>
             </a:fld>
             <a:endParaRPr kumimoji="1" lang="ja-JP" altLang="en-US"/>
           </a:p>
@@ -2337,7 +2337,7 @@
           <a:p>
             <a:fld id="{0E085FA6-3BB9-47BA-8D81-299A75D1B58A}" type="datetimeFigureOut">
               <a:rPr kumimoji="1" lang="ja-JP" altLang="en-US" smtClean="0"/>
-              <a:t>2026/3/5</a:t>
+              <a:t>2026/3/12</a:t>
             </a:fld>
             <a:endParaRPr kumimoji="1" lang="ja-JP" altLang="en-US"/>
           </a:p>
@@ -2589,7 +2589,7 @@
           <a:p>
             <a:fld id="{0E085FA6-3BB9-47BA-8D81-299A75D1B58A}" type="datetimeFigureOut">
               <a:rPr kumimoji="1" lang="ja-JP" altLang="en-US" smtClean="0"/>
-              <a:t>2026/3/5</a:t>
+              <a:t>2026/3/12</a:t>
             </a:fld>
             <a:endParaRPr kumimoji="1" lang="ja-JP" altLang="en-US"/>
           </a:p>
@@ -2832,7 +2832,7 @@
           <a:p>
             <a:fld id="{0E085FA6-3BB9-47BA-8D81-299A75D1B58A}" type="datetimeFigureOut">
               <a:rPr kumimoji="1" lang="ja-JP" altLang="en-US" smtClean="0"/>
-              <a:t>2026/3/5</a:t>
+              <a:t>2026/3/12</a:t>
             </a:fld>
             <a:endParaRPr kumimoji="1" lang="ja-JP" altLang="en-US"/>
           </a:p>
@@ -3331,13 +3331,13 @@
       </p:sp>
       <p:sp>
         <p:nvSpPr>
-          <p:cNvPr id="138" name="正方形/長方形 137"/>
+          <p:cNvPr id="28" name="正方形/長方形 27"/>
           <p:cNvSpPr/>
           <p:nvPr/>
         </p:nvSpPr>
         <p:spPr>
           <a:xfrm>
-            <a:off x="6234424" y="4285748"/>
+            <a:off x="4784366" y="4278860"/>
             <a:ext cx="443630" cy="443630"/>
           </a:xfrm>
           <a:prstGeom prst="rect">
@@ -3375,16 +3375,1094 @@
           </a:p>
         </p:txBody>
       </p:sp>
-      <p:sp>
-        <p:nvSpPr>
-          <p:cNvPr id="137" name="正方形/長方形 136"/>
+      <p:pic>
+        <p:nvPicPr>
+          <p:cNvPr id="20" name="図 19"/>
+          <p:cNvPicPr>
+            <a:picLocks noChangeAspect="1"/>
+          </p:cNvPicPr>
+          <p:nvPr/>
+        </p:nvPicPr>
+        <p:blipFill>
+          <a:blip r:embed="rId2"/>
+          <a:stretch>
+            <a:fillRect/>
+          </a:stretch>
+        </p:blipFill>
+        <p:spPr>
+          <a:xfrm>
+            <a:off x="1619370" y="3437811"/>
+            <a:ext cx="383754" cy="382075"/>
+          </a:xfrm>
+          <a:prstGeom prst="rect">
+            <a:avLst/>
+          </a:prstGeom>
+        </p:spPr>
+      </p:pic>
+      <p:pic>
+        <p:nvPicPr>
+          <p:cNvPr id="41" name="図 40"/>
+          <p:cNvPicPr>
+            <a:picLocks noChangeAspect="1"/>
+          </p:cNvPicPr>
+          <p:nvPr/>
+        </p:nvPicPr>
+        <p:blipFill>
+          <a:blip r:embed="rId2"/>
+          <a:stretch>
+            <a:fillRect/>
+          </a:stretch>
+        </p:blipFill>
+        <p:spPr>
+          <a:xfrm rot="9445844">
+            <a:off x="1952138" y="3279341"/>
+            <a:ext cx="383754" cy="382075"/>
+          </a:xfrm>
+          <a:prstGeom prst="rect">
+            <a:avLst/>
+          </a:prstGeom>
+        </p:spPr>
+      </p:pic>
+      <p:pic>
+        <p:nvPicPr>
+          <p:cNvPr id="42" name="図 41"/>
+          <p:cNvPicPr>
+            <a:picLocks noChangeAspect="1"/>
+          </p:cNvPicPr>
+          <p:nvPr/>
+        </p:nvPicPr>
+        <p:blipFill>
+          <a:blip r:embed="rId2"/>
+          <a:stretch>
+            <a:fillRect/>
+          </a:stretch>
+        </p:blipFill>
+        <p:spPr>
+          <a:xfrm rot="18076713">
+            <a:off x="2087762" y="3497843"/>
+            <a:ext cx="383754" cy="382075"/>
+          </a:xfrm>
+          <a:prstGeom prst="rect">
+            <a:avLst/>
+          </a:prstGeom>
+        </p:spPr>
+      </p:pic>
+      <p:pic>
+        <p:nvPicPr>
+          <p:cNvPr id="43" name="図 42"/>
+          <p:cNvPicPr>
+            <a:picLocks noChangeAspect="1"/>
+          </p:cNvPicPr>
+          <p:nvPr/>
+        </p:nvPicPr>
+        <p:blipFill>
+          <a:blip r:embed="rId2"/>
+          <a:stretch>
+            <a:fillRect/>
+          </a:stretch>
+        </p:blipFill>
+        <p:spPr>
+          <a:xfrm rot="21090871">
+            <a:off x="2420530" y="3339373"/>
+            <a:ext cx="383754" cy="382075"/>
+          </a:xfrm>
+          <a:prstGeom prst="rect">
+            <a:avLst/>
+          </a:prstGeom>
+        </p:spPr>
+      </p:pic>
+      <p:pic>
+        <p:nvPicPr>
+          <p:cNvPr id="44" name="図 43"/>
+          <p:cNvPicPr>
+            <a:picLocks noChangeAspect="1"/>
+          </p:cNvPicPr>
+          <p:nvPr/>
+        </p:nvPicPr>
+        <p:blipFill>
+          <a:blip r:embed="rId2"/>
+          <a:stretch>
+            <a:fillRect/>
+          </a:stretch>
+        </p:blipFill>
+        <p:spPr>
+          <a:xfrm rot="16497857">
+            <a:off x="2709168" y="3477280"/>
+            <a:ext cx="383754" cy="382075"/>
+          </a:xfrm>
+          <a:prstGeom prst="rect">
+            <a:avLst/>
+          </a:prstGeom>
+        </p:spPr>
+      </p:pic>
+      <p:pic>
+        <p:nvPicPr>
+          <p:cNvPr id="45" name="図 44"/>
+          <p:cNvPicPr>
+            <a:picLocks noChangeAspect="1"/>
+          </p:cNvPicPr>
+          <p:nvPr/>
+        </p:nvPicPr>
+        <p:blipFill>
+          <a:blip r:embed="rId2"/>
+          <a:stretch>
+            <a:fillRect/>
+          </a:stretch>
+        </p:blipFill>
+        <p:spPr>
+          <a:xfrm rot="2057333">
+            <a:off x="3041936" y="3318810"/>
+            <a:ext cx="383754" cy="382075"/>
+          </a:xfrm>
+          <a:prstGeom prst="rect">
+            <a:avLst/>
+          </a:prstGeom>
+        </p:spPr>
+      </p:pic>
+      <p:pic>
+        <p:nvPicPr>
+          <p:cNvPr id="46" name="図 45"/>
+          <p:cNvPicPr>
+            <a:picLocks noChangeAspect="1"/>
+          </p:cNvPicPr>
+          <p:nvPr/>
+        </p:nvPicPr>
+        <p:blipFill>
+          <a:blip r:embed="rId2"/>
+          <a:stretch>
+            <a:fillRect/>
+          </a:stretch>
+        </p:blipFill>
+        <p:spPr>
+          <a:xfrm rot="15047229">
+            <a:off x="3177560" y="3537312"/>
+            <a:ext cx="383754" cy="382075"/>
+          </a:xfrm>
+          <a:prstGeom prst="rect">
+            <a:avLst/>
+          </a:prstGeom>
+        </p:spPr>
+      </p:pic>
+      <p:pic>
+        <p:nvPicPr>
+          <p:cNvPr id="47" name="図 46"/>
+          <p:cNvPicPr>
+            <a:picLocks noChangeAspect="1"/>
+          </p:cNvPicPr>
+          <p:nvPr/>
+        </p:nvPicPr>
+        <p:blipFill>
+          <a:blip r:embed="rId2"/>
+          <a:stretch>
+            <a:fillRect/>
+          </a:stretch>
+        </p:blipFill>
+        <p:spPr>
+          <a:xfrm rot="20134046">
+            <a:off x="3510328" y="3378842"/>
+            <a:ext cx="383754" cy="382075"/>
+          </a:xfrm>
+          <a:prstGeom prst="rect">
+            <a:avLst/>
+          </a:prstGeom>
+        </p:spPr>
+      </p:pic>
+      <p:pic>
+        <p:nvPicPr>
+          <p:cNvPr id="48" name="図 47"/>
+          <p:cNvPicPr>
+            <a:picLocks noChangeAspect="1"/>
+          </p:cNvPicPr>
+          <p:nvPr/>
+        </p:nvPicPr>
+        <p:blipFill>
+          <a:blip r:embed="rId2"/>
+          <a:stretch>
+            <a:fillRect/>
+          </a:stretch>
+        </p:blipFill>
+        <p:spPr>
+          <a:xfrm rot="17043799">
+            <a:off x="1600399" y="3069004"/>
+            <a:ext cx="383754" cy="382075"/>
+          </a:xfrm>
+          <a:prstGeom prst="rect">
+            <a:avLst/>
+          </a:prstGeom>
+        </p:spPr>
+      </p:pic>
+      <p:pic>
+        <p:nvPicPr>
+          <p:cNvPr id="49" name="図 48"/>
+          <p:cNvPicPr>
+            <a:picLocks noChangeAspect="1"/>
+          </p:cNvPicPr>
+          <p:nvPr/>
+        </p:nvPicPr>
+        <p:blipFill>
+          <a:blip r:embed="rId2"/>
+          <a:stretch>
+            <a:fillRect/>
+          </a:stretch>
+        </p:blipFill>
+        <p:spPr>
+          <a:xfrm rot="9445844">
+            <a:off x="1933167" y="2910534"/>
+            <a:ext cx="383754" cy="382075"/>
+          </a:xfrm>
+          <a:prstGeom prst="rect">
+            <a:avLst/>
+          </a:prstGeom>
+        </p:spPr>
+      </p:pic>
+      <p:pic>
+        <p:nvPicPr>
+          <p:cNvPr id="50" name="図 49"/>
+          <p:cNvPicPr>
+            <a:picLocks noChangeAspect="1"/>
+          </p:cNvPicPr>
+          <p:nvPr/>
+        </p:nvPicPr>
+        <p:blipFill>
+          <a:blip r:embed="rId2"/>
+          <a:stretch>
+            <a:fillRect/>
+          </a:stretch>
+        </p:blipFill>
+        <p:spPr>
+          <a:xfrm rot="18076713">
+            <a:off x="2068791" y="3129036"/>
+            <a:ext cx="383754" cy="382075"/>
+          </a:xfrm>
+          <a:prstGeom prst="rect">
+            <a:avLst/>
+          </a:prstGeom>
+        </p:spPr>
+      </p:pic>
+      <p:pic>
+        <p:nvPicPr>
+          <p:cNvPr id="51" name="図 50"/>
+          <p:cNvPicPr>
+            <a:picLocks noChangeAspect="1"/>
+          </p:cNvPicPr>
+          <p:nvPr/>
+        </p:nvPicPr>
+        <p:blipFill>
+          <a:blip r:embed="rId2"/>
+          <a:stretch>
+            <a:fillRect/>
+          </a:stretch>
+        </p:blipFill>
+        <p:spPr>
+          <a:xfrm rot="1546535">
+            <a:off x="2401559" y="2970566"/>
+            <a:ext cx="383754" cy="382075"/>
+          </a:xfrm>
+          <a:prstGeom prst="rect">
+            <a:avLst/>
+          </a:prstGeom>
+        </p:spPr>
+      </p:pic>
+      <p:pic>
+        <p:nvPicPr>
+          <p:cNvPr id="52" name="図 51"/>
+          <p:cNvPicPr>
+            <a:picLocks noChangeAspect="1"/>
+          </p:cNvPicPr>
+          <p:nvPr/>
+        </p:nvPicPr>
+        <p:blipFill>
+          <a:blip r:embed="rId2"/>
+          <a:stretch>
+            <a:fillRect/>
+          </a:stretch>
+        </p:blipFill>
+        <p:spPr>
+          <a:xfrm rot="7792455">
+            <a:off x="2690197" y="3108473"/>
+            <a:ext cx="383754" cy="382075"/>
+          </a:xfrm>
+          <a:prstGeom prst="rect">
+            <a:avLst/>
+          </a:prstGeom>
+        </p:spPr>
+      </p:pic>
+      <p:pic>
+        <p:nvPicPr>
+          <p:cNvPr id="53" name="図 52"/>
+          <p:cNvPicPr>
+            <a:picLocks noChangeAspect="1"/>
+          </p:cNvPicPr>
+          <p:nvPr/>
+        </p:nvPicPr>
+        <p:blipFill>
+          <a:blip r:embed="rId2"/>
+          <a:stretch>
+            <a:fillRect/>
+          </a:stretch>
+        </p:blipFill>
+        <p:spPr>
+          <a:xfrm rot="21241290">
+            <a:off x="3022965" y="2950003"/>
+            <a:ext cx="383754" cy="382075"/>
+          </a:xfrm>
+          <a:prstGeom prst="rect">
+            <a:avLst/>
+          </a:prstGeom>
+        </p:spPr>
+      </p:pic>
+      <p:pic>
+        <p:nvPicPr>
+          <p:cNvPr id="54" name="図 53"/>
+          <p:cNvPicPr>
+            <a:picLocks noChangeAspect="1"/>
+          </p:cNvPicPr>
+          <p:nvPr/>
+        </p:nvPicPr>
+        <p:blipFill>
+          <a:blip r:embed="rId2"/>
+          <a:stretch>
+            <a:fillRect/>
+          </a:stretch>
+        </p:blipFill>
+        <p:spPr>
+          <a:xfrm rot="8272159">
+            <a:off x="3158589" y="3168505"/>
+            <a:ext cx="383754" cy="382075"/>
+          </a:xfrm>
+          <a:prstGeom prst="rect">
+            <a:avLst/>
+          </a:prstGeom>
+        </p:spPr>
+      </p:pic>
+      <p:pic>
+        <p:nvPicPr>
+          <p:cNvPr id="55" name="図 54"/>
+          <p:cNvPicPr>
+            <a:picLocks noChangeAspect="1"/>
+          </p:cNvPicPr>
+          <p:nvPr/>
+        </p:nvPicPr>
+        <p:blipFill>
+          <a:blip r:embed="rId2"/>
+          <a:stretch>
+            <a:fillRect/>
+          </a:stretch>
+        </p:blipFill>
+        <p:spPr>
+          <a:xfrm rot="15992884">
+            <a:off x="3491357" y="3010035"/>
+            <a:ext cx="383754" cy="382075"/>
+          </a:xfrm>
+          <a:prstGeom prst="rect">
+            <a:avLst/>
+          </a:prstGeom>
+        </p:spPr>
+      </p:pic>
+      <p:pic>
+        <p:nvPicPr>
+          <p:cNvPr id="56" name="図 55"/>
+          <p:cNvPicPr>
+            <a:picLocks noChangeAspect="1"/>
+          </p:cNvPicPr>
+          <p:nvPr/>
+        </p:nvPicPr>
+        <p:blipFill>
+          <a:blip r:embed="rId2"/>
+          <a:stretch>
+            <a:fillRect/>
+          </a:stretch>
+        </p:blipFill>
+        <p:spPr>
+          <a:xfrm rot="2208086">
+            <a:off x="1601774" y="2693918"/>
+            <a:ext cx="383754" cy="382075"/>
+          </a:xfrm>
+          <a:prstGeom prst="rect">
+            <a:avLst/>
+          </a:prstGeom>
+        </p:spPr>
+      </p:pic>
+      <p:pic>
+        <p:nvPicPr>
+          <p:cNvPr id="57" name="図 56"/>
+          <p:cNvPicPr>
+            <a:picLocks noChangeAspect="1"/>
+          </p:cNvPicPr>
+          <p:nvPr/>
+        </p:nvPicPr>
+        <p:blipFill>
+          <a:blip r:embed="rId2"/>
+          <a:stretch>
+            <a:fillRect/>
+          </a:stretch>
+        </p:blipFill>
+        <p:spPr>
+          <a:xfrm rot="6438077">
+            <a:off x="1934542" y="2535448"/>
+            <a:ext cx="383754" cy="382075"/>
+          </a:xfrm>
+          <a:prstGeom prst="rect">
+            <a:avLst/>
+          </a:prstGeom>
+        </p:spPr>
+      </p:pic>
+      <p:pic>
+        <p:nvPicPr>
+          <p:cNvPr id="58" name="図 57"/>
+          <p:cNvPicPr>
+            <a:picLocks noChangeAspect="1"/>
+          </p:cNvPicPr>
+          <p:nvPr/>
+        </p:nvPicPr>
+        <p:blipFill>
+          <a:blip r:embed="rId2"/>
+          <a:stretch>
+            <a:fillRect/>
+          </a:stretch>
+        </p:blipFill>
+        <p:spPr>
+          <a:xfrm rot="15068946">
+            <a:off x="2070166" y="2753950"/>
+            <a:ext cx="383754" cy="382075"/>
+          </a:xfrm>
+          <a:prstGeom prst="rect">
+            <a:avLst/>
+          </a:prstGeom>
+        </p:spPr>
+      </p:pic>
+      <p:pic>
+        <p:nvPicPr>
+          <p:cNvPr id="59" name="図 58"/>
+          <p:cNvPicPr>
+            <a:picLocks noChangeAspect="1"/>
+          </p:cNvPicPr>
+          <p:nvPr/>
+        </p:nvPicPr>
+        <p:blipFill>
+          <a:blip r:embed="rId2"/>
+          <a:stretch>
+            <a:fillRect/>
+          </a:stretch>
+        </p:blipFill>
+        <p:spPr>
+          <a:xfrm rot="3911655">
+            <a:off x="2402934" y="2595480"/>
+            <a:ext cx="383754" cy="382075"/>
+          </a:xfrm>
+          <a:prstGeom prst="rect">
+            <a:avLst/>
+          </a:prstGeom>
+        </p:spPr>
+      </p:pic>
+      <p:pic>
+        <p:nvPicPr>
+          <p:cNvPr id="60" name="図 59"/>
+          <p:cNvPicPr>
+            <a:picLocks noChangeAspect="1"/>
+          </p:cNvPicPr>
+          <p:nvPr/>
+        </p:nvPicPr>
+        <p:blipFill>
+          <a:blip r:embed="rId2"/>
+          <a:stretch>
+            <a:fillRect/>
+          </a:stretch>
+        </p:blipFill>
+        <p:spPr>
+          <a:xfrm rot="8056334">
+            <a:off x="2691572" y="2733387"/>
+            <a:ext cx="383754" cy="382075"/>
+          </a:xfrm>
+          <a:prstGeom prst="rect">
+            <a:avLst/>
+          </a:prstGeom>
+        </p:spPr>
+      </p:pic>
+      <p:pic>
+        <p:nvPicPr>
+          <p:cNvPr id="61" name="図 60"/>
+          <p:cNvPicPr>
+            <a:picLocks noChangeAspect="1"/>
+          </p:cNvPicPr>
+          <p:nvPr/>
+        </p:nvPicPr>
+        <p:blipFill>
+          <a:blip r:embed="rId2"/>
+          <a:stretch>
+            <a:fillRect/>
+          </a:stretch>
+        </p:blipFill>
+        <p:spPr>
+          <a:xfrm rot="6478117">
+            <a:off x="3024340" y="2574917"/>
+            <a:ext cx="383754" cy="382075"/>
+          </a:xfrm>
+          <a:prstGeom prst="rect">
+            <a:avLst/>
+          </a:prstGeom>
+        </p:spPr>
+      </p:pic>
+      <p:pic>
+        <p:nvPicPr>
+          <p:cNvPr id="62" name="図 61"/>
+          <p:cNvPicPr>
+            <a:picLocks noChangeAspect="1"/>
+          </p:cNvPicPr>
+          <p:nvPr/>
+        </p:nvPicPr>
+        <p:blipFill>
+          <a:blip r:embed="rId2"/>
+          <a:stretch>
+            <a:fillRect/>
+          </a:stretch>
+        </p:blipFill>
+        <p:spPr>
+          <a:xfrm rot="18204998">
+            <a:off x="3159964" y="2793419"/>
+            <a:ext cx="383754" cy="382075"/>
+          </a:xfrm>
+          <a:prstGeom prst="rect">
+            <a:avLst/>
+          </a:prstGeom>
+        </p:spPr>
+      </p:pic>
+      <p:pic>
+        <p:nvPicPr>
+          <p:cNvPr id="63" name="図 62"/>
+          <p:cNvPicPr>
+            <a:picLocks noChangeAspect="1"/>
+          </p:cNvPicPr>
+          <p:nvPr/>
+        </p:nvPicPr>
+        <p:blipFill>
+          <a:blip r:embed="rId2"/>
+          <a:stretch>
+            <a:fillRect/>
+          </a:stretch>
+        </p:blipFill>
+        <p:spPr>
+          <a:xfrm rot="4325723">
+            <a:off x="3492732" y="2634949"/>
+            <a:ext cx="383754" cy="382075"/>
+          </a:xfrm>
+          <a:prstGeom prst="rect">
+            <a:avLst/>
+          </a:prstGeom>
+        </p:spPr>
+      </p:pic>
+      <p:pic>
+        <p:nvPicPr>
+          <p:cNvPr id="64" name="図 63"/>
+          <p:cNvPicPr>
+            <a:picLocks noChangeAspect="1"/>
+          </p:cNvPicPr>
+          <p:nvPr/>
+        </p:nvPicPr>
+        <p:blipFill>
+          <a:blip r:embed="rId2"/>
+          <a:stretch>
+            <a:fillRect/>
+          </a:stretch>
+        </p:blipFill>
+        <p:spPr>
+          <a:xfrm rot="16577374">
+            <a:off x="1582803" y="2325111"/>
+            <a:ext cx="383754" cy="382075"/>
+          </a:xfrm>
+          <a:prstGeom prst="rect">
+            <a:avLst/>
+          </a:prstGeom>
+        </p:spPr>
+      </p:pic>
+      <p:pic>
+        <p:nvPicPr>
+          <p:cNvPr id="65" name="図 64"/>
+          <p:cNvPicPr>
+            <a:picLocks noChangeAspect="1"/>
+          </p:cNvPicPr>
+          <p:nvPr/>
+        </p:nvPicPr>
+        <p:blipFill>
+          <a:blip r:embed="rId2"/>
+          <a:stretch>
+            <a:fillRect/>
+          </a:stretch>
+        </p:blipFill>
+        <p:spPr>
+          <a:xfrm rot="4423218">
+            <a:off x="1915571" y="2166641"/>
+            <a:ext cx="383754" cy="382075"/>
+          </a:xfrm>
+          <a:prstGeom prst="rect">
+            <a:avLst/>
+          </a:prstGeom>
+        </p:spPr>
+      </p:pic>
+      <p:pic>
+        <p:nvPicPr>
+          <p:cNvPr id="66" name="図 65"/>
+          <p:cNvPicPr>
+            <a:picLocks noChangeAspect="1"/>
+          </p:cNvPicPr>
+          <p:nvPr/>
+        </p:nvPicPr>
+        <p:blipFill>
+          <a:blip r:embed="rId2"/>
+          <a:stretch>
+            <a:fillRect/>
+          </a:stretch>
+        </p:blipFill>
+        <p:spPr>
+          <a:xfrm rot="7838234">
+            <a:off x="2051195" y="2385143"/>
+            <a:ext cx="383754" cy="382075"/>
+          </a:xfrm>
+          <a:prstGeom prst="rect">
+            <a:avLst/>
+          </a:prstGeom>
+        </p:spPr>
+      </p:pic>
+      <p:pic>
+        <p:nvPicPr>
+          <p:cNvPr id="67" name="図 66"/>
+          <p:cNvPicPr>
+            <a:picLocks noChangeAspect="1"/>
+          </p:cNvPicPr>
+          <p:nvPr/>
+        </p:nvPicPr>
+        <p:blipFill>
+          <a:blip r:embed="rId2"/>
+          <a:stretch>
+            <a:fillRect/>
+          </a:stretch>
+        </p:blipFill>
+        <p:spPr>
+          <a:xfrm rot="3568271">
+            <a:off x="2383963" y="2226673"/>
+            <a:ext cx="383754" cy="382075"/>
+          </a:xfrm>
+          <a:prstGeom prst="rect">
+            <a:avLst/>
+          </a:prstGeom>
+        </p:spPr>
+      </p:pic>
+      <p:pic>
+        <p:nvPicPr>
+          <p:cNvPr id="68" name="図 67"/>
+          <p:cNvPicPr>
+            <a:picLocks noChangeAspect="1"/>
+          </p:cNvPicPr>
+          <p:nvPr/>
+        </p:nvPicPr>
+        <p:blipFill>
+          <a:blip r:embed="rId2"/>
+          <a:stretch>
+            <a:fillRect/>
+          </a:stretch>
+        </p:blipFill>
+        <p:spPr>
+          <a:xfrm rot="14143571">
+            <a:off x="2672601" y="2364580"/>
+            <a:ext cx="383754" cy="382075"/>
+          </a:xfrm>
+          <a:prstGeom prst="rect">
+            <a:avLst/>
+          </a:prstGeom>
+        </p:spPr>
+      </p:pic>
+      <p:pic>
+        <p:nvPicPr>
+          <p:cNvPr id="69" name="図 68"/>
+          <p:cNvPicPr>
+            <a:picLocks noChangeAspect="1"/>
+          </p:cNvPicPr>
+          <p:nvPr/>
+        </p:nvPicPr>
+        <p:blipFill>
+          <a:blip r:embed="rId2"/>
+          <a:stretch>
+            <a:fillRect/>
+          </a:stretch>
+        </p:blipFill>
+        <p:spPr>
+          <a:xfrm rot="4062074">
+            <a:off x="3005369" y="2206110"/>
+            <a:ext cx="383754" cy="382075"/>
+          </a:xfrm>
+          <a:prstGeom prst="rect">
+            <a:avLst/>
+          </a:prstGeom>
+        </p:spPr>
+      </p:pic>
+      <p:pic>
+        <p:nvPicPr>
+          <p:cNvPr id="70" name="図 69"/>
+          <p:cNvPicPr>
+            <a:picLocks noChangeAspect="1"/>
+          </p:cNvPicPr>
+          <p:nvPr/>
+        </p:nvPicPr>
+        <p:blipFill>
+          <a:blip r:embed="rId2"/>
+          <a:stretch>
+            <a:fillRect/>
+          </a:stretch>
+        </p:blipFill>
+        <p:spPr>
+          <a:xfrm rot="12692943">
+            <a:off x="3140993" y="2424612"/>
+            <a:ext cx="383754" cy="382075"/>
+          </a:xfrm>
+          <a:prstGeom prst="rect">
+            <a:avLst/>
+          </a:prstGeom>
+        </p:spPr>
+      </p:pic>
+      <p:pic>
+        <p:nvPicPr>
+          <p:cNvPr id="71" name="図 70"/>
+          <p:cNvPicPr>
+            <a:picLocks noChangeAspect="1"/>
+          </p:cNvPicPr>
+          <p:nvPr/>
+        </p:nvPicPr>
+        <p:blipFill>
+          <a:blip r:embed="rId2"/>
+          <a:stretch>
+            <a:fillRect/>
+          </a:stretch>
+        </p:blipFill>
+        <p:spPr>
+          <a:xfrm rot="538787">
+            <a:off x="3597688" y="2250004"/>
+            <a:ext cx="383754" cy="382075"/>
+          </a:xfrm>
+          <a:prstGeom prst="rect">
+            <a:avLst/>
+          </a:prstGeom>
+        </p:spPr>
+      </p:pic>
+      <p:pic>
+        <p:nvPicPr>
+          <p:cNvPr id="72" name="図 71"/>
+          <p:cNvPicPr>
+            <a:picLocks noChangeAspect="1"/>
+          </p:cNvPicPr>
+          <p:nvPr/>
+        </p:nvPicPr>
+        <p:blipFill>
+          <a:blip r:embed="rId2"/>
+          <a:stretch>
+            <a:fillRect/>
+          </a:stretch>
+        </p:blipFill>
+        <p:spPr>
+          <a:xfrm rot="6438077">
+            <a:off x="2204076" y="2019042"/>
+            <a:ext cx="383754" cy="382075"/>
+          </a:xfrm>
+          <a:prstGeom prst="rect">
+            <a:avLst/>
+          </a:prstGeom>
+        </p:spPr>
+      </p:pic>
+      <p:pic>
+        <p:nvPicPr>
+          <p:cNvPr id="73" name="図 72"/>
+          <p:cNvPicPr>
+            <a:picLocks noChangeAspect="1"/>
+          </p:cNvPicPr>
+          <p:nvPr/>
+        </p:nvPicPr>
+        <p:blipFill>
+          <a:blip r:embed="rId2"/>
+          <a:stretch>
+            <a:fillRect/>
+          </a:stretch>
+        </p:blipFill>
+        <p:spPr>
+          <a:xfrm rot="11246664">
+            <a:off x="1518809" y="1964353"/>
+            <a:ext cx="383754" cy="382075"/>
+          </a:xfrm>
+          <a:prstGeom prst="rect">
+            <a:avLst/>
+          </a:prstGeom>
+        </p:spPr>
+      </p:pic>
+      <p:pic>
+        <p:nvPicPr>
+          <p:cNvPr id="74" name="図 73"/>
+          <p:cNvPicPr>
+            <a:picLocks noChangeAspect="1"/>
+          </p:cNvPicPr>
+          <p:nvPr/>
+        </p:nvPicPr>
+        <p:blipFill>
+          <a:blip r:embed="rId2"/>
+          <a:stretch>
+            <a:fillRect/>
+          </a:stretch>
+        </p:blipFill>
+        <p:spPr>
+          <a:xfrm rot="12538046">
+            <a:off x="1855440" y="1822999"/>
+            <a:ext cx="383754" cy="382075"/>
+          </a:xfrm>
+          <a:prstGeom prst="rect">
+            <a:avLst/>
+          </a:prstGeom>
+        </p:spPr>
+      </p:pic>
+      <p:pic>
+        <p:nvPicPr>
+          <p:cNvPr id="75" name="図 74"/>
+          <p:cNvPicPr>
+            <a:picLocks noChangeAspect="1"/>
+          </p:cNvPicPr>
+          <p:nvPr/>
+        </p:nvPicPr>
+        <p:blipFill>
+          <a:blip r:embed="rId2"/>
+          <a:stretch>
+            <a:fillRect/>
+          </a:stretch>
+        </p:blipFill>
+        <p:spPr>
+          <a:xfrm rot="3641941">
+            <a:off x="2434775" y="1750999"/>
+            <a:ext cx="383754" cy="382075"/>
+          </a:xfrm>
+          <a:prstGeom prst="rect">
+            <a:avLst/>
+          </a:prstGeom>
+        </p:spPr>
+      </p:pic>
+      <p:pic>
+        <p:nvPicPr>
+          <p:cNvPr id="76" name="図 75"/>
+          <p:cNvPicPr>
+            <a:picLocks noChangeAspect="1"/>
+          </p:cNvPicPr>
+          <p:nvPr/>
+        </p:nvPicPr>
+        <p:blipFill>
+          <a:blip r:embed="rId2"/>
+          <a:stretch>
+            <a:fillRect/>
+          </a:stretch>
+        </p:blipFill>
+        <p:spPr>
+          <a:xfrm rot="18339093">
+            <a:off x="2675332" y="1973626"/>
+            <a:ext cx="383754" cy="382075"/>
+          </a:xfrm>
+          <a:prstGeom prst="rect">
+            <a:avLst/>
+          </a:prstGeom>
+        </p:spPr>
+      </p:pic>
+      <p:pic>
+        <p:nvPicPr>
+          <p:cNvPr id="77" name="図 76"/>
+          <p:cNvPicPr>
+            <a:picLocks noChangeAspect="1"/>
+          </p:cNvPicPr>
+          <p:nvPr/>
+        </p:nvPicPr>
+        <p:blipFill>
+          <a:blip r:embed="rId2"/>
+          <a:stretch>
+            <a:fillRect/>
+          </a:stretch>
+        </p:blipFill>
+        <p:spPr>
+          <a:xfrm rot="6208403">
+            <a:off x="2949282" y="1730952"/>
+            <a:ext cx="383754" cy="382075"/>
+          </a:xfrm>
+          <a:prstGeom prst="rect">
+            <a:avLst/>
+          </a:prstGeom>
+        </p:spPr>
+      </p:pic>
+      <p:pic>
+        <p:nvPicPr>
+          <p:cNvPr id="78" name="図 77"/>
+          <p:cNvPicPr>
+            <a:picLocks noChangeAspect="1"/>
+          </p:cNvPicPr>
+          <p:nvPr/>
+        </p:nvPicPr>
+        <p:blipFill>
+          <a:blip r:embed="rId2"/>
+          <a:stretch>
+            <a:fillRect/>
+          </a:stretch>
+        </p:blipFill>
+        <p:spPr>
+          <a:xfrm rot="14839272">
+            <a:off x="3162989" y="1901394"/>
+            <a:ext cx="383754" cy="382075"/>
+          </a:xfrm>
+          <a:prstGeom prst="rect">
+            <a:avLst/>
+          </a:prstGeom>
+        </p:spPr>
+      </p:pic>
+      <p:pic>
+        <p:nvPicPr>
+          <p:cNvPr id="79" name="図 78"/>
+          <p:cNvPicPr>
+            <a:picLocks noChangeAspect="1"/>
+          </p:cNvPicPr>
+          <p:nvPr/>
+        </p:nvPicPr>
+        <p:blipFill>
+          <a:blip r:embed="rId2"/>
+          <a:stretch>
+            <a:fillRect/>
+          </a:stretch>
+        </p:blipFill>
+        <p:spPr>
+          <a:xfrm rot="538787">
+            <a:off x="3326592" y="2156293"/>
+            <a:ext cx="383754" cy="382075"/>
+          </a:xfrm>
+          <a:prstGeom prst="rect">
+            <a:avLst/>
+          </a:prstGeom>
+        </p:spPr>
+      </p:pic>
+      <p:pic>
+        <p:nvPicPr>
+          <p:cNvPr id="80" name="図 79"/>
+          <p:cNvPicPr>
+            <a:picLocks noChangeAspect="1"/>
+          </p:cNvPicPr>
+          <p:nvPr/>
+        </p:nvPicPr>
+        <p:blipFill>
+          <a:blip r:embed="rId2"/>
+          <a:stretch>
+            <a:fillRect/>
+          </a:stretch>
+        </p:blipFill>
+        <p:spPr>
+          <a:xfrm rot="2685116">
+            <a:off x="3593574" y="1900214"/>
+            <a:ext cx="383754" cy="382075"/>
+          </a:xfrm>
+          <a:prstGeom prst="rect">
+            <a:avLst/>
+          </a:prstGeom>
+        </p:spPr>
+      </p:pic>
+      <p:pic>
+        <p:nvPicPr>
+          <p:cNvPr id="18" name="図 17"/>
+          <p:cNvPicPr>
+            <a:picLocks noChangeAspect="1"/>
+          </p:cNvPicPr>
+          <p:nvPr/>
+        </p:nvPicPr>
+        <p:blipFill rotWithShape="1">
+          <a:blip r:embed="rId3"/>
+          <a:srcRect t="79693"/>
+          <a:stretch/>
+        </p:blipFill>
+        <p:spPr>
+          <a:xfrm>
+            <a:off x="1332010" y="4908371"/>
+            <a:ext cx="2877561" cy="878982"/>
+          </a:xfrm>
+          <a:prstGeom prst="rect">
+            <a:avLst/>
+          </a:prstGeom>
+        </p:spPr>
+      </p:pic>
+      <p:pic>
+        <p:nvPicPr>
+          <p:cNvPr id="24" name="図 23"/>
+          <p:cNvPicPr>
+            <a:picLocks noChangeAspect="1"/>
+          </p:cNvPicPr>
+          <p:nvPr/>
+        </p:nvPicPr>
+        <p:blipFill>
+          <a:blip r:embed="rId4"/>
+          <a:stretch>
+            <a:fillRect/>
+          </a:stretch>
+        </p:blipFill>
+        <p:spPr>
+          <a:xfrm>
+            <a:off x="4813581" y="4418477"/>
+            <a:ext cx="385200" cy="270818"/>
+          </a:xfrm>
+          <a:prstGeom prst="rect">
+            <a:avLst/>
+          </a:prstGeom>
+        </p:spPr>
+      </p:pic>
+      <p:pic>
+        <p:nvPicPr>
+          <p:cNvPr id="2" name="図 1"/>
+          <p:cNvPicPr>
+            <a:picLocks noChangeAspect="1"/>
+          </p:cNvPicPr>
+          <p:nvPr/>
+        </p:nvPicPr>
+        <p:blipFill rotWithShape="1">
+          <a:blip r:embed="rId5"/>
+          <a:srcRect b="13815"/>
+          <a:stretch/>
+        </p:blipFill>
+        <p:spPr>
+          <a:xfrm>
+            <a:off x="1332010" y="1470964"/>
+            <a:ext cx="2877561" cy="3520349"/>
+          </a:xfrm>
+          <a:prstGeom prst="rect">
+            <a:avLst/>
+          </a:prstGeom>
+        </p:spPr>
+      </p:pic>
+      <p:pic>
+        <p:nvPicPr>
+          <p:cNvPr id="3" name="図 2"/>
+          <p:cNvPicPr>
+            <a:picLocks noChangeAspect="1"/>
+          </p:cNvPicPr>
+          <p:nvPr/>
+        </p:nvPicPr>
+        <p:blipFill>
+          <a:blip r:embed="rId6"/>
+          <a:stretch>
+            <a:fillRect/>
+          </a:stretch>
+        </p:blipFill>
+        <p:spPr>
+          <a:xfrm>
+            <a:off x="4671720" y="2711461"/>
+            <a:ext cx="688908" cy="682811"/>
+          </a:xfrm>
+          <a:prstGeom prst="rect">
+            <a:avLst/>
+          </a:prstGeom>
+        </p:spPr>
+      </p:pic>
+      <p:sp>
+        <p:nvSpPr>
+          <p:cNvPr id="83" name="正方形/長方形 82"/>
           <p:cNvSpPr/>
           <p:nvPr/>
         </p:nvSpPr>
         <p:spPr>
           <a:xfrm>
-            <a:off x="5507333" y="4282882"/>
-            <a:ext cx="443630" cy="443630"/>
+            <a:off x="5575185" y="2177151"/>
+            <a:ext cx="1748039" cy="1759493"/>
           </a:xfrm>
           <a:prstGeom prst="rect">
             <a:avLst/>
@@ -3423,23 +4501,27 @@
       </p:sp>
       <p:sp>
         <p:nvSpPr>
-          <p:cNvPr id="28" name="正方形/長方形 27"/>
+          <p:cNvPr id="91" name="下カーブ矢印 90"/>
           <p:cNvSpPr/>
           <p:nvPr/>
         </p:nvSpPr>
         <p:spPr>
-          <a:xfrm>
-            <a:off x="4784366" y="4278860"/>
-            <a:ext cx="443630" cy="443630"/>
-          </a:xfrm>
-          <a:prstGeom prst="rect">
-            <a:avLst/>
-          </a:prstGeom>
-          <a:noFill/>
+          <a:xfrm rot="6300000">
+            <a:off x="6193100" y="2969933"/>
+            <a:ext cx="1294661" cy="498126"/>
+          </a:xfrm>
+          <a:prstGeom prst="curvedDownArrow">
+            <a:avLst>
+              <a:gd name="adj1" fmla="val 40185"/>
+              <a:gd name="adj2" fmla="val 95231"/>
+              <a:gd name="adj3" fmla="val 36473"/>
+            </a:avLst>
+          </a:prstGeom>
+          <a:solidFill>
+            <a:srgbClr val="FFEEB9"/>
+          </a:solidFill>
           <a:ln>
-            <a:solidFill>
-              <a:schemeClr val="tx1"/>
-            </a:solidFill>
+            <a:noFill/>
           </a:ln>
         </p:spPr>
         <p:style>
@@ -3463,1155 +4545,37 @@
           <a:lstStyle/>
           <a:p>
             <a:pPr algn="ctr"/>
-            <a:endParaRPr kumimoji="1" lang="ja-JP" altLang="en-US"/>
-          </a:p>
-        </p:txBody>
-      </p:sp>
-      <p:pic>
-        <p:nvPicPr>
-          <p:cNvPr id="20" name="図 19"/>
-          <p:cNvPicPr>
-            <a:picLocks noChangeAspect="1"/>
-          </p:cNvPicPr>
-          <p:nvPr/>
-        </p:nvPicPr>
-        <p:blipFill>
-          <a:blip r:embed="rId2"/>
-          <a:stretch>
-            <a:fillRect/>
-          </a:stretch>
-        </p:blipFill>
-        <p:spPr>
-          <a:xfrm>
-            <a:off x="1619370" y="3437811"/>
-            <a:ext cx="383754" cy="382075"/>
-          </a:xfrm>
-          <a:prstGeom prst="rect">
-            <a:avLst/>
-          </a:prstGeom>
-        </p:spPr>
-      </p:pic>
-      <p:pic>
-        <p:nvPicPr>
-          <p:cNvPr id="41" name="図 40"/>
-          <p:cNvPicPr>
-            <a:picLocks noChangeAspect="1"/>
-          </p:cNvPicPr>
-          <p:nvPr/>
-        </p:nvPicPr>
-        <p:blipFill>
-          <a:blip r:embed="rId2"/>
-          <a:stretch>
-            <a:fillRect/>
-          </a:stretch>
-        </p:blipFill>
-        <p:spPr>
-          <a:xfrm rot="9445844">
-            <a:off x="1952138" y="3279341"/>
-            <a:ext cx="383754" cy="382075"/>
-          </a:xfrm>
-          <a:prstGeom prst="rect">
-            <a:avLst/>
-          </a:prstGeom>
-        </p:spPr>
-      </p:pic>
-      <p:pic>
-        <p:nvPicPr>
-          <p:cNvPr id="42" name="図 41"/>
-          <p:cNvPicPr>
-            <a:picLocks noChangeAspect="1"/>
-          </p:cNvPicPr>
-          <p:nvPr/>
-        </p:nvPicPr>
-        <p:blipFill>
-          <a:blip r:embed="rId2"/>
-          <a:stretch>
-            <a:fillRect/>
-          </a:stretch>
-        </p:blipFill>
-        <p:spPr>
-          <a:xfrm rot="18076713">
-            <a:off x="2087762" y="3497843"/>
-            <a:ext cx="383754" cy="382075"/>
-          </a:xfrm>
-          <a:prstGeom prst="rect">
-            <a:avLst/>
-          </a:prstGeom>
-        </p:spPr>
-      </p:pic>
-      <p:pic>
-        <p:nvPicPr>
-          <p:cNvPr id="43" name="図 42"/>
-          <p:cNvPicPr>
-            <a:picLocks noChangeAspect="1"/>
-          </p:cNvPicPr>
-          <p:nvPr/>
-        </p:nvPicPr>
-        <p:blipFill>
-          <a:blip r:embed="rId2"/>
-          <a:stretch>
-            <a:fillRect/>
-          </a:stretch>
-        </p:blipFill>
-        <p:spPr>
-          <a:xfrm rot="21090871">
-            <a:off x="2420530" y="3339373"/>
-            <a:ext cx="383754" cy="382075"/>
-          </a:xfrm>
-          <a:prstGeom prst="rect">
-            <a:avLst/>
-          </a:prstGeom>
-        </p:spPr>
-      </p:pic>
-      <p:pic>
-        <p:nvPicPr>
-          <p:cNvPr id="44" name="図 43"/>
-          <p:cNvPicPr>
-            <a:picLocks noChangeAspect="1"/>
-          </p:cNvPicPr>
-          <p:nvPr/>
-        </p:nvPicPr>
-        <p:blipFill>
-          <a:blip r:embed="rId2"/>
-          <a:stretch>
-            <a:fillRect/>
-          </a:stretch>
-        </p:blipFill>
-        <p:spPr>
-          <a:xfrm rot="16497857">
-            <a:off x="2709168" y="3477280"/>
-            <a:ext cx="383754" cy="382075"/>
-          </a:xfrm>
-          <a:prstGeom prst="rect">
-            <a:avLst/>
-          </a:prstGeom>
-        </p:spPr>
-      </p:pic>
-      <p:pic>
-        <p:nvPicPr>
-          <p:cNvPr id="45" name="図 44"/>
-          <p:cNvPicPr>
-            <a:picLocks noChangeAspect="1"/>
-          </p:cNvPicPr>
-          <p:nvPr/>
-        </p:nvPicPr>
-        <p:blipFill>
-          <a:blip r:embed="rId2"/>
-          <a:stretch>
-            <a:fillRect/>
-          </a:stretch>
-        </p:blipFill>
-        <p:spPr>
-          <a:xfrm rot="2057333">
-            <a:off x="3041936" y="3318810"/>
-            <a:ext cx="383754" cy="382075"/>
-          </a:xfrm>
-          <a:prstGeom prst="rect">
-            <a:avLst/>
-          </a:prstGeom>
-        </p:spPr>
-      </p:pic>
-      <p:pic>
-        <p:nvPicPr>
-          <p:cNvPr id="46" name="図 45"/>
-          <p:cNvPicPr>
-            <a:picLocks noChangeAspect="1"/>
-          </p:cNvPicPr>
-          <p:nvPr/>
-        </p:nvPicPr>
-        <p:blipFill>
-          <a:blip r:embed="rId2"/>
-          <a:stretch>
-            <a:fillRect/>
-          </a:stretch>
-        </p:blipFill>
-        <p:spPr>
-          <a:xfrm rot="15047229">
-            <a:off x="3177560" y="3537312"/>
-            <a:ext cx="383754" cy="382075"/>
-          </a:xfrm>
-          <a:prstGeom prst="rect">
-            <a:avLst/>
-          </a:prstGeom>
-        </p:spPr>
-      </p:pic>
-      <p:pic>
-        <p:nvPicPr>
-          <p:cNvPr id="47" name="図 46"/>
-          <p:cNvPicPr>
-            <a:picLocks noChangeAspect="1"/>
-          </p:cNvPicPr>
-          <p:nvPr/>
-        </p:nvPicPr>
-        <p:blipFill>
-          <a:blip r:embed="rId2"/>
-          <a:stretch>
-            <a:fillRect/>
-          </a:stretch>
-        </p:blipFill>
-        <p:spPr>
-          <a:xfrm rot="20134046">
-            <a:off x="3510328" y="3378842"/>
-            <a:ext cx="383754" cy="382075"/>
-          </a:xfrm>
-          <a:prstGeom prst="rect">
-            <a:avLst/>
-          </a:prstGeom>
-        </p:spPr>
-      </p:pic>
-      <p:pic>
-        <p:nvPicPr>
-          <p:cNvPr id="48" name="図 47"/>
-          <p:cNvPicPr>
-            <a:picLocks noChangeAspect="1"/>
-          </p:cNvPicPr>
-          <p:nvPr/>
-        </p:nvPicPr>
-        <p:blipFill>
-          <a:blip r:embed="rId2"/>
-          <a:stretch>
-            <a:fillRect/>
-          </a:stretch>
-        </p:blipFill>
-        <p:spPr>
-          <a:xfrm rot="17043799">
-            <a:off x="1600399" y="3069004"/>
-            <a:ext cx="383754" cy="382075"/>
-          </a:xfrm>
-          <a:prstGeom prst="rect">
-            <a:avLst/>
-          </a:prstGeom>
-        </p:spPr>
-      </p:pic>
-      <p:pic>
-        <p:nvPicPr>
-          <p:cNvPr id="49" name="図 48"/>
-          <p:cNvPicPr>
-            <a:picLocks noChangeAspect="1"/>
-          </p:cNvPicPr>
-          <p:nvPr/>
-        </p:nvPicPr>
-        <p:blipFill>
-          <a:blip r:embed="rId2"/>
-          <a:stretch>
-            <a:fillRect/>
-          </a:stretch>
-        </p:blipFill>
-        <p:spPr>
-          <a:xfrm rot="9445844">
-            <a:off x="1933167" y="2910534"/>
-            <a:ext cx="383754" cy="382075"/>
-          </a:xfrm>
-          <a:prstGeom prst="rect">
-            <a:avLst/>
-          </a:prstGeom>
-        </p:spPr>
-      </p:pic>
-      <p:pic>
-        <p:nvPicPr>
-          <p:cNvPr id="50" name="図 49"/>
-          <p:cNvPicPr>
-            <a:picLocks noChangeAspect="1"/>
-          </p:cNvPicPr>
-          <p:nvPr/>
-        </p:nvPicPr>
-        <p:blipFill>
-          <a:blip r:embed="rId2"/>
-          <a:stretch>
-            <a:fillRect/>
-          </a:stretch>
-        </p:blipFill>
-        <p:spPr>
-          <a:xfrm rot="18076713">
-            <a:off x="2068791" y="3129036"/>
-            <a:ext cx="383754" cy="382075"/>
-          </a:xfrm>
-          <a:prstGeom prst="rect">
-            <a:avLst/>
-          </a:prstGeom>
-        </p:spPr>
-      </p:pic>
-      <p:pic>
-        <p:nvPicPr>
-          <p:cNvPr id="51" name="図 50"/>
-          <p:cNvPicPr>
-            <a:picLocks noChangeAspect="1"/>
-          </p:cNvPicPr>
-          <p:nvPr/>
-        </p:nvPicPr>
-        <p:blipFill>
-          <a:blip r:embed="rId2"/>
-          <a:stretch>
-            <a:fillRect/>
-          </a:stretch>
-        </p:blipFill>
-        <p:spPr>
-          <a:xfrm rot="1546535">
-            <a:off x="2401559" y="2970566"/>
-            <a:ext cx="383754" cy="382075"/>
-          </a:xfrm>
-          <a:prstGeom prst="rect">
-            <a:avLst/>
-          </a:prstGeom>
-        </p:spPr>
-      </p:pic>
-      <p:pic>
-        <p:nvPicPr>
-          <p:cNvPr id="52" name="図 51"/>
-          <p:cNvPicPr>
-            <a:picLocks noChangeAspect="1"/>
-          </p:cNvPicPr>
-          <p:nvPr/>
-        </p:nvPicPr>
-        <p:blipFill>
-          <a:blip r:embed="rId2"/>
-          <a:stretch>
-            <a:fillRect/>
-          </a:stretch>
-        </p:blipFill>
-        <p:spPr>
-          <a:xfrm rot="7792455">
-            <a:off x="2690197" y="3108473"/>
-            <a:ext cx="383754" cy="382075"/>
-          </a:xfrm>
-          <a:prstGeom prst="rect">
-            <a:avLst/>
-          </a:prstGeom>
-        </p:spPr>
-      </p:pic>
-      <p:pic>
-        <p:nvPicPr>
-          <p:cNvPr id="53" name="図 52"/>
-          <p:cNvPicPr>
-            <a:picLocks noChangeAspect="1"/>
-          </p:cNvPicPr>
-          <p:nvPr/>
-        </p:nvPicPr>
-        <p:blipFill>
-          <a:blip r:embed="rId2"/>
-          <a:stretch>
-            <a:fillRect/>
-          </a:stretch>
-        </p:blipFill>
-        <p:spPr>
-          <a:xfrm rot="21241290">
-            <a:off x="3022965" y="2950003"/>
-            <a:ext cx="383754" cy="382075"/>
-          </a:xfrm>
-          <a:prstGeom prst="rect">
-            <a:avLst/>
-          </a:prstGeom>
-        </p:spPr>
-      </p:pic>
-      <p:pic>
-        <p:nvPicPr>
-          <p:cNvPr id="54" name="図 53"/>
-          <p:cNvPicPr>
-            <a:picLocks noChangeAspect="1"/>
-          </p:cNvPicPr>
-          <p:nvPr/>
-        </p:nvPicPr>
-        <p:blipFill>
-          <a:blip r:embed="rId2"/>
-          <a:stretch>
-            <a:fillRect/>
-          </a:stretch>
-        </p:blipFill>
-        <p:spPr>
-          <a:xfrm rot="8272159">
-            <a:off x="3158589" y="3168505"/>
-            <a:ext cx="383754" cy="382075"/>
-          </a:xfrm>
-          <a:prstGeom prst="rect">
-            <a:avLst/>
-          </a:prstGeom>
-        </p:spPr>
-      </p:pic>
-      <p:pic>
-        <p:nvPicPr>
-          <p:cNvPr id="55" name="図 54"/>
-          <p:cNvPicPr>
-            <a:picLocks noChangeAspect="1"/>
-          </p:cNvPicPr>
-          <p:nvPr/>
-        </p:nvPicPr>
-        <p:blipFill>
-          <a:blip r:embed="rId2"/>
-          <a:stretch>
-            <a:fillRect/>
-          </a:stretch>
-        </p:blipFill>
-        <p:spPr>
-          <a:xfrm rot="15992884">
-            <a:off x="3491357" y="3010035"/>
-            <a:ext cx="383754" cy="382075"/>
-          </a:xfrm>
-          <a:prstGeom prst="rect">
-            <a:avLst/>
-          </a:prstGeom>
-        </p:spPr>
-      </p:pic>
-      <p:pic>
-        <p:nvPicPr>
-          <p:cNvPr id="56" name="図 55"/>
-          <p:cNvPicPr>
-            <a:picLocks noChangeAspect="1"/>
-          </p:cNvPicPr>
-          <p:nvPr/>
-        </p:nvPicPr>
-        <p:blipFill>
-          <a:blip r:embed="rId2"/>
-          <a:stretch>
-            <a:fillRect/>
-          </a:stretch>
-        </p:blipFill>
-        <p:spPr>
-          <a:xfrm rot="2208086">
-            <a:off x="1601774" y="2693918"/>
-            <a:ext cx="383754" cy="382075"/>
-          </a:xfrm>
-          <a:prstGeom prst="rect">
-            <a:avLst/>
-          </a:prstGeom>
-        </p:spPr>
-      </p:pic>
-      <p:pic>
-        <p:nvPicPr>
-          <p:cNvPr id="57" name="図 56"/>
-          <p:cNvPicPr>
-            <a:picLocks noChangeAspect="1"/>
-          </p:cNvPicPr>
-          <p:nvPr/>
-        </p:nvPicPr>
-        <p:blipFill>
-          <a:blip r:embed="rId2"/>
-          <a:stretch>
-            <a:fillRect/>
-          </a:stretch>
-        </p:blipFill>
-        <p:spPr>
-          <a:xfrm rot="6438077">
-            <a:off x="1934542" y="2535448"/>
-            <a:ext cx="383754" cy="382075"/>
-          </a:xfrm>
-          <a:prstGeom prst="rect">
-            <a:avLst/>
-          </a:prstGeom>
-        </p:spPr>
-      </p:pic>
-      <p:pic>
-        <p:nvPicPr>
-          <p:cNvPr id="58" name="図 57"/>
-          <p:cNvPicPr>
-            <a:picLocks noChangeAspect="1"/>
-          </p:cNvPicPr>
-          <p:nvPr/>
-        </p:nvPicPr>
-        <p:blipFill>
-          <a:blip r:embed="rId2"/>
-          <a:stretch>
-            <a:fillRect/>
-          </a:stretch>
-        </p:blipFill>
-        <p:spPr>
-          <a:xfrm rot="15068946">
-            <a:off x="2070166" y="2753950"/>
-            <a:ext cx="383754" cy="382075"/>
-          </a:xfrm>
-          <a:prstGeom prst="rect">
-            <a:avLst/>
-          </a:prstGeom>
-        </p:spPr>
-      </p:pic>
-      <p:pic>
-        <p:nvPicPr>
-          <p:cNvPr id="59" name="図 58"/>
-          <p:cNvPicPr>
-            <a:picLocks noChangeAspect="1"/>
-          </p:cNvPicPr>
-          <p:nvPr/>
-        </p:nvPicPr>
-        <p:blipFill>
-          <a:blip r:embed="rId2"/>
-          <a:stretch>
-            <a:fillRect/>
-          </a:stretch>
-        </p:blipFill>
-        <p:spPr>
-          <a:xfrm rot="3911655">
-            <a:off x="2402934" y="2595480"/>
-            <a:ext cx="383754" cy="382075"/>
-          </a:xfrm>
-          <a:prstGeom prst="rect">
-            <a:avLst/>
-          </a:prstGeom>
-        </p:spPr>
-      </p:pic>
-      <p:pic>
-        <p:nvPicPr>
-          <p:cNvPr id="60" name="図 59"/>
-          <p:cNvPicPr>
-            <a:picLocks noChangeAspect="1"/>
-          </p:cNvPicPr>
-          <p:nvPr/>
-        </p:nvPicPr>
-        <p:blipFill>
-          <a:blip r:embed="rId2"/>
-          <a:stretch>
-            <a:fillRect/>
-          </a:stretch>
-        </p:blipFill>
-        <p:spPr>
-          <a:xfrm rot="8056334">
-            <a:off x="2691572" y="2733387"/>
-            <a:ext cx="383754" cy="382075"/>
-          </a:xfrm>
-          <a:prstGeom prst="rect">
-            <a:avLst/>
-          </a:prstGeom>
-        </p:spPr>
-      </p:pic>
-      <p:pic>
-        <p:nvPicPr>
-          <p:cNvPr id="61" name="図 60"/>
-          <p:cNvPicPr>
-            <a:picLocks noChangeAspect="1"/>
-          </p:cNvPicPr>
-          <p:nvPr/>
-        </p:nvPicPr>
-        <p:blipFill>
-          <a:blip r:embed="rId2"/>
-          <a:stretch>
-            <a:fillRect/>
-          </a:stretch>
-        </p:blipFill>
-        <p:spPr>
-          <a:xfrm rot="6478117">
-            <a:off x="3024340" y="2574917"/>
-            <a:ext cx="383754" cy="382075"/>
-          </a:xfrm>
-          <a:prstGeom prst="rect">
-            <a:avLst/>
-          </a:prstGeom>
-        </p:spPr>
-      </p:pic>
-      <p:pic>
-        <p:nvPicPr>
-          <p:cNvPr id="62" name="図 61"/>
-          <p:cNvPicPr>
-            <a:picLocks noChangeAspect="1"/>
-          </p:cNvPicPr>
-          <p:nvPr/>
-        </p:nvPicPr>
-        <p:blipFill>
-          <a:blip r:embed="rId2"/>
-          <a:stretch>
-            <a:fillRect/>
-          </a:stretch>
-        </p:blipFill>
-        <p:spPr>
-          <a:xfrm rot="18204998">
-            <a:off x="3159964" y="2793419"/>
-            <a:ext cx="383754" cy="382075"/>
-          </a:xfrm>
-          <a:prstGeom prst="rect">
-            <a:avLst/>
-          </a:prstGeom>
-        </p:spPr>
-      </p:pic>
-      <p:pic>
-        <p:nvPicPr>
-          <p:cNvPr id="63" name="図 62"/>
-          <p:cNvPicPr>
-            <a:picLocks noChangeAspect="1"/>
-          </p:cNvPicPr>
-          <p:nvPr/>
-        </p:nvPicPr>
-        <p:blipFill>
-          <a:blip r:embed="rId2"/>
-          <a:stretch>
-            <a:fillRect/>
-          </a:stretch>
-        </p:blipFill>
-        <p:spPr>
-          <a:xfrm rot="4325723">
-            <a:off x="3492732" y="2634949"/>
-            <a:ext cx="383754" cy="382075"/>
-          </a:xfrm>
-          <a:prstGeom prst="rect">
-            <a:avLst/>
-          </a:prstGeom>
-        </p:spPr>
-      </p:pic>
-      <p:pic>
-        <p:nvPicPr>
-          <p:cNvPr id="64" name="図 63"/>
-          <p:cNvPicPr>
-            <a:picLocks noChangeAspect="1"/>
-          </p:cNvPicPr>
-          <p:nvPr/>
-        </p:nvPicPr>
-        <p:blipFill>
-          <a:blip r:embed="rId2"/>
-          <a:stretch>
-            <a:fillRect/>
-          </a:stretch>
-        </p:blipFill>
-        <p:spPr>
-          <a:xfrm rot="16577374">
-            <a:off x="1582803" y="2325111"/>
-            <a:ext cx="383754" cy="382075"/>
-          </a:xfrm>
-          <a:prstGeom prst="rect">
-            <a:avLst/>
-          </a:prstGeom>
-        </p:spPr>
-      </p:pic>
-      <p:pic>
-        <p:nvPicPr>
-          <p:cNvPr id="65" name="図 64"/>
-          <p:cNvPicPr>
-            <a:picLocks noChangeAspect="1"/>
-          </p:cNvPicPr>
-          <p:nvPr/>
-        </p:nvPicPr>
-        <p:blipFill>
-          <a:blip r:embed="rId2"/>
-          <a:stretch>
-            <a:fillRect/>
-          </a:stretch>
-        </p:blipFill>
-        <p:spPr>
-          <a:xfrm rot="4423218">
-            <a:off x="1915571" y="2166641"/>
-            <a:ext cx="383754" cy="382075"/>
-          </a:xfrm>
-          <a:prstGeom prst="rect">
-            <a:avLst/>
-          </a:prstGeom>
-        </p:spPr>
-      </p:pic>
-      <p:pic>
-        <p:nvPicPr>
-          <p:cNvPr id="66" name="図 65"/>
-          <p:cNvPicPr>
-            <a:picLocks noChangeAspect="1"/>
-          </p:cNvPicPr>
-          <p:nvPr/>
-        </p:nvPicPr>
-        <p:blipFill>
-          <a:blip r:embed="rId2"/>
-          <a:stretch>
-            <a:fillRect/>
-          </a:stretch>
-        </p:blipFill>
-        <p:spPr>
-          <a:xfrm rot="7838234">
-            <a:off x="2051195" y="2385143"/>
-            <a:ext cx="383754" cy="382075"/>
-          </a:xfrm>
-          <a:prstGeom prst="rect">
-            <a:avLst/>
-          </a:prstGeom>
-        </p:spPr>
-      </p:pic>
-      <p:pic>
-        <p:nvPicPr>
-          <p:cNvPr id="67" name="図 66"/>
-          <p:cNvPicPr>
-            <a:picLocks noChangeAspect="1"/>
-          </p:cNvPicPr>
-          <p:nvPr/>
-        </p:nvPicPr>
-        <p:blipFill>
-          <a:blip r:embed="rId2"/>
-          <a:stretch>
-            <a:fillRect/>
-          </a:stretch>
-        </p:blipFill>
-        <p:spPr>
-          <a:xfrm rot="3568271">
-            <a:off x="2383963" y="2226673"/>
-            <a:ext cx="383754" cy="382075"/>
-          </a:xfrm>
-          <a:prstGeom prst="rect">
-            <a:avLst/>
-          </a:prstGeom>
-        </p:spPr>
-      </p:pic>
-      <p:pic>
-        <p:nvPicPr>
-          <p:cNvPr id="68" name="図 67"/>
-          <p:cNvPicPr>
-            <a:picLocks noChangeAspect="1"/>
-          </p:cNvPicPr>
-          <p:nvPr/>
-        </p:nvPicPr>
-        <p:blipFill>
-          <a:blip r:embed="rId2"/>
-          <a:stretch>
-            <a:fillRect/>
-          </a:stretch>
-        </p:blipFill>
-        <p:spPr>
-          <a:xfrm rot="14143571">
-            <a:off x="2672601" y="2364580"/>
-            <a:ext cx="383754" cy="382075"/>
-          </a:xfrm>
-          <a:prstGeom prst="rect">
-            <a:avLst/>
-          </a:prstGeom>
-        </p:spPr>
-      </p:pic>
-      <p:pic>
-        <p:nvPicPr>
-          <p:cNvPr id="69" name="図 68"/>
-          <p:cNvPicPr>
-            <a:picLocks noChangeAspect="1"/>
-          </p:cNvPicPr>
-          <p:nvPr/>
-        </p:nvPicPr>
-        <p:blipFill>
-          <a:blip r:embed="rId2"/>
-          <a:stretch>
-            <a:fillRect/>
-          </a:stretch>
-        </p:blipFill>
-        <p:spPr>
-          <a:xfrm rot="4062074">
-            <a:off x="3005369" y="2206110"/>
-            <a:ext cx="383754" cy="382075"/>
-          </a:xfrm>
-          <a:prstGeom prst="rect">
-            <a:avLst/>
-          </a:prstGeom>
-        </p:spPr>
-      </p:pic>
-      <p:pic>
-        <p:nvPicPr>
-          <p:cNvPr id="70" name="図 69"/>
-          <p:cNvPicPr>
-            <a:picLocks noChangeAspect="1"/>
-          </p:cNvPicPr>
-          <p:nvPr/>
-        </p:nvPicPr>
-        <p:blipFill>
-          <a:blip r:embed="rId2"/>
-          <a:stretch>
-            <a:fillRect/>
-          </a:stretch>
-        </p:blipFill>
-        <p:spPr>
-          <a:xfrm rot="12692943">
-            <a:off x="3140993" y="2424612"/>
-            <a:ext cx="383754" cy="382075"/>
-          </a:xfrm>
-          <a:prstGeom prst="rect">
-            <a:avLst/>
-          </a:prstGeom>
-        </p:spPr>
-      </p:pic>
-      <p:pic>
-        <p:nvPicPr>
-          <p:cNvPr id="71" name="図 70"/>
-          <p:cNvPicPr>
-            <a:picLocks noChangeAspect="1"/>
-          </p:cNvPicPr>
-          <p:nvPr/>
-        </p:nvPicPr>
-        <p:blipFill>
-          <a:blip r:embed="rId2"/>
-          <a:stretch>
-            <a:fillRect/>
-          </a:stretch>
-        </p:blipFill>
-        <p:spPr>
-          <a:xfrm rot="538787">
-            <a:off x="3597688" y="2250004"/>
-            <a:ext cx="383754" cy="382075"/>
-          </a:xfrm>
-          <a:prstGeom prst="rect">
-            <a:avLst/>
-          </a:prstGeom>
-        </p:spPr>
-      </p:pic>
-      <p:pic>
-        <p:nvPicPr>
-          <p:cNvPr id="72" name="図 71"/>
-          <p:cNvPicPr>
-            <a:picLocks noChangeAspect="1"/>
-          </p:cNvPicPr>
-          <p:nvPr/>
-        </p:nvPicPr>
-        <p:blipFill>
-          <a:blip r:embed="rId2"/>
-          <a:stretch>
-            <a:fillRect/>
-          </a:stretch>
-        </p:blipFill>
-        <p:spPr>
-          <a:xfrm rot="6438077">
-            <a:off x="2204076" y="2019042"/>
-            <a:ext cx="383754" cy="382075"/>
-          </a:xfrm>
-          <a:prstGeom prst="rect">
-            <a:avLst/>
-          </a:prstGeom>
-        </p:spPr>
-      </p:pic>
-      <p:pic>
-        <p:nvPicPr>
-          <p:cNvPr id="73" name="図 72"/>
-          <p:cNvPicPr>
-            <a:picLocks noChangeAspect="1"/>
-          </p:cNvPicPr>
-          <p:nvPr/>
-        </p:nvPicPr>
-        <p:blipFill>
-          <a:blip r:embed="rId2"/>
-          <a:stretch>
-            <a:fillRect/>
-          </a:stretch>
-        </p:blipFill>
-        <p:spPr>
-          <a:xfrm rot="11246664">
-            <a:off x="1518809" y="1964353"/>
-            <a:ext cx="383754" cy="382075"/>
-          </a:xfrm>
-          <a:prstGeom prst="rect">
-            <a:avLst/>
-          </a:prstGeom>
-        </p:spPr>
-      </p:pic>
-      <p:pic>
-        <p:nvPicPr>
-          <p:cNvPr id="74" name="図 73"/>
-          <p:cNvPicPr>
-            <a:picLocks noChangeAspect="1"/>
-          </p:cNvPicPr>
-          <p:nvPr/>
-        </p:nvPicPr>
-        <p:blipFill>
-          <a:blip r:embed="rId2"/>
-          <a:stretch>
-            <a:fillRect/>
-          </a:stretch>
-        </p:blipFill>
-        <p:spPr>
-          <a:xfrm rot="12538046">
-            <a:off x="1855440" y="1822999"/>
-            <a:ext cx="383754" cy="382075"/>
-          </a:xfrm>
-          <a:prstGeom prst="rect">
-            <a:avLst/>
-          </a:prstGeom>
-        </p:spPr>
-      </p:pic>
-      <p:pic>
-        <p:nvPicPr>
-          <p:cNvPr id="75" name="図 74"/>
-          <p:cNvPicPr>
-            <a:picLocks noChangeAspect="1"/>
-          </p:cNvPicPr>
-          <p:nvPr/>
-        </p:nvPicPr>
-        <p:blipFill>
-          <a:blip r:embed="rId2"/>
-          <a:stretch>
-            <a:fillRect/>
-          </a:stretch>
-        </p:blipFill>
-        <p:spPr>
-          <a:xfrm rot="3641941">
-            <a:off x="2434775" y="1750999"/>
-            <a:ext cx="383754" cy="382075"/>
-          </a:xfrm>
-          <a:prstGeom prst="rect">
-            <a:avLst/>
-          </a:prstGeom>
-        </p:spPr>
-      </p:pic>
-      <p:pic>
-        <p:nvPicPr>
-          <p:cNvPr id="76" name="図 75"/>
-          <p:cNvPicPr>
-            <a:picLocks noChangeAspect="1"/>
-          </p:cNvPicPr>
-          <p:nvPr/>
-        </p:nvPicPr>
-        <p:blipFill>
-          <a:blip r:embed="rId2"/>
-          <a:stretch>
-            <a:fillRect/>
-          </a:stretch>
-        </p:blipFill>
-        <p:spPr>
-          <a:xfrm rot="18339093">
-            <a:off x="2675332" y="1973626"/>
-            <a:ext cx="383754" cy="382075"/>
-          </a:xfrm>
-          <a:prstGeom prst="rect">
-            <a:avLst/>
-          </a:prstGeom>
-        </p:spPr>
-      </p:pic>
-      <p:pic>
-        <p:nvPicPr>
-          <p:cNvPr id="77" name="図 76"/>
-          <p:cNvPicPr>
-            <a:picLocks noChangeAspect="1"/>
-          </p:cNvPicPr>
-          <p:nvPr/>
-        </p:nvPicPr>
-        <p:blipFill>
-          <a:blip r:embed="rId2"/>
-          <a:stretch>
-            <a:fillRect/>
-          </a:stretch>
-        </p:blipFill>
-        <p:spPr>
-          <a:xfrm rot="6208403">
-            <a:off x="2949282" y="1730952"/>
-            <a:ext cx="383754" cy="382075"/>
-          </a:xfrm>
-          <a:prstGeom prst="rect">
-            <a:avLst/>
-          </a:prstGeom>
-        </p:spPr>
-      </p:pic>
-      <p:pic>
-        <p:nvPicPr>
-          <p:cNvPr id="78" name="図 77"/>
-          <p:cNvPicPr>
-            <a:picLocks noChangeAspect="1"/>
-          </p:cNvPicPr>
-          <p:nvPr/>
-        </p:nvPicPr>
-        <p:blipFill>
-          <a:blip r:embed="rId2"/>
-          <a:stretch>
-            <a:fillRect/>
-          </a:stretch>
-        </p:blipFill>
-        <p:spPr>
-          <a:xfrm rot="14839272">
-            <a:off x="3162989" y="1901394"/>
-            <a:ext cx="383754" cy="382075"/>
-          </a:xfrm>
-          <a:prstGeom prst="rect">
-            <a:avLst/>
-          </a:prstGeom>
-        </p:spPr>
-      </p:pic>
-      <p:pic>
-        <p:nvPicPr>
-          <p:cNvPr id="79" name="図 78"/>
-          <p:cNvPicPr>
-            <a:picLocks noChangeAspect="1"/>
-          </p:cNvPicPr>
-          <p:nvPr/>
-        </p:nvPicPr>
-        <p:blipFill>
-          <a:blip r:embed="rId2"/>
-          <a:stretch>
-            <a:fillRect/>
-          </a:stretch>
-        </p:blipFill>
-        <p:spPr>
-          <a:xfrm rot="538787">
-            <a:off x="3326592" y="2156293"/>
-            <a:ext cx="383754" cy="382075"/>
-          </a:xfrm>
-          <a:prstGeom prst="rect">
-            <a:avLst/>
-          </a:prstGeom>
-        </p:spPr>
-      </p:pic>
-      <p:pic>
-        <p:nvPicPr>
-          <p:cNvPr id="80" name="図 79"/>
-          <p:cNvPicPr>
-            <a:picLocks noChangeAspect="1"/>
-          </p:cNvPicPr>
-          <p:nvPr/>
-        </p:nvPicPr>
-        <p:blipFill>
-          <a:blip r:embed="rId2"/>
-          <a:stretch>
-            <a:fillRect/>
-          </a:stretch>
-        </p:blipFill>
-        <p:spPr>
-          <a:xfrm rot="2685116">
-            <a:off x="3593574" y="1900214"/>
-            <a:ext cx="383754" cy="382075"/>
-          </a:xfrm>
-          <a:prstGeom prst="rect">
-            <a:avLst/>
-          </a:prstGeom>
-        </p:spPr>
-      </p:pic>
-      <p:pic>
-        <p:nvPicPr>
-          <p:cNvPr id="18" name="図 17"/>
-          <p:cNvPicPr>
-            <a:picLocks noChangeAspect="1"/>
-          </p:cNvPicPr>
-          <p:nvPr/>
-        </p:nvPicPr>
-        <p:blipFill rotWithShape="1">
-          <a:blip r:embed="rId3"/>
-          <a:srcRect t="79693"/>
-          <a:stretch/>
-        </p:blipFill>
-        <p:spPr>
-          <a:xfrm>
-            <a:off x="1332010" y="4908371"/>
-            <a:ext cx="2877561" cy="878982"/>
-          </a:xfrm>
-          <a:prstGeom prst="rect">
-            <a:avLst/>
-          </a:prstGeom>
-        </p:spPr>
-      </p:pic>
-      <p:pic>
-        <p:nvPicPr>
-          <p:cNvPr id="81" name="図 80"/>
-          <p:cNvPicPr>
-            <a:picLocks noChangeAspect="1"/>
-          </p:cNvPicPr>
-          <p:nvPr/>
-        </p:nvPicPr>
-        <p:blipFill>
-          <a:blip r:embed="rId2"/>
-          <a:stretch>
-            <a:fillRect/>
-          </a:stretch>
-        </p:blipFill>
-        <p:spPr>
-          <a:xfrm>
-            <a:off x="4814304" y="4309638"/>
-            <a:ext cx="383754" cy="382075"/>
-          </a:xfrm>
-          <a:prstGeom prst="rect">
-            <a:avLst/>
-          </a:prstGeom>
-        </p:spPr>
-      </p:pic>
-      <p:pic>
-        <p:nvPicPr>
-          <p:cNvPr id="22" name="図 21"/>
-          <p:cNvPicPr>
-            <a:picLocks noChangeAspect="1"/>
-          </p:cNvPicPr>
-          <p:nvPr/>
-        </p:nvPicPr>
-        <p:blipFill>
-          <a:blip r:embed="rId4"/>
-          <a:stretch>
-            <a:fillRect/>
-          </a:stretch>
-        </p:blipFill>
-        <p:spPr>
-          <a:xfrm>
-            <a:off x="5536548" y="4379107"/>
-            <a:ext cx="385200" cy="251181"/>
-          </a:xfrm>
-          <a:prstGeom prst="rect">
-            <a:avLst/>
-          </a:prstGeom>
-        </p:spPr>
-      </p:pic>
-      <p:pic>
-        <p:nvPicPr>
-          <p:cNvPr id="24" name="図 23"/>
-          <p:cNvPicPr>
-            <a:picLocks noChangeAspect="1"/>
-          </p:cNvPicPr>
-          <p:nvPr/>
-        </p:nvPicPr>
-        <p:blipFill>
-          <a:blip r:embed="rId5"/>
-          <a:stretch>
-            <a:fillRect/>
-          </a:stretch>
-        </p:blipFill>
-        <p:spPr>
-          <a:xfrm>
-            <a:off x="6263639" y="4372154"/>
-            <a:ext cx="385200" cy="270818"/>
-          </a:xfrm>
-          <a:prstGeom prst="rect">
-            <a:avLst/>
-          </a:prstGeom>
-        </p:spPr>
-      </p:pic>
-      <p:pic>
-        <p:nvPicPr>
-          <p:cNvPr id="2" name="図 1"/>
-          <p:cNvPicPr>
-            <a:picLocks noChangeAspect="1"/>
-          </p:cNvPicPr>
-          <p:nvPr/>
-        </p:nvPicPr>
-        <p:blipFill rotWithShape="1">
-          <a:blip r:embed="rId6"/>
-          <a:srcRect b="13815"/>
-          <a:stretch/>
-        </p:blipFill>
-        <p:spPr>
-          <a:xfrm>
-            <a:off x="1332010" y="1470964"/>
-            <a:ext cx="2877561" cy="3520349"/>
-          </a:xfrm>
-          <a:prstGeom prst="rect">
-            <a:avLst/>
-          </a:prstGeom>
-        </p:spPr>
-      </p:pic>
-      <p:pic>
-        <p:nvPicPr>
-          <p:cNvPr id="3" name="図 2"/>
-          <p:cNvPicPr>
-            <a:picLocks noChangeAspect="1"/>
-          </p:cNvPicPr>
-          <p:nvPr/>
-        </p:nvPicPr>
-        <p:blipFill>
-          <a:blip r:embed="rId7"/>
-          <a:stretch>
-            <a:fillRect/>
-          </a:stretch>
-        </p:blipFill>
-        <p:spPr>
-          <a:xfrm>
-            <a:off x="4671720" y="2711461"/>
-            <a:ext cx="688908" cy="682811"/>
-          </a:xfrm>
-          <a:prstGeom prst="rect">
-            <a:avLst/>
-          </a:prstGeom>
-        </p:spPr>
-      </p:pic>
-      <p:sp>
-        <p:nvSpPr>
-          <p:cNvPr id="83" name="正方形/長方形 82"/>
+            <a:endParaRPr kumimoji="1" lang="ja-JP" altLang="en-US">
+              <a:solidFill>
+                <a:schemeClr val="tx1"/>
+              </a:solidFill>
+            </a:endParaRPr>
+          </a:p>
+        </p:txBody>
+      </p:sp>
+      <p:sp>
+        <p:nvSpPr>
+          <p:cNvPr id="92" name="下カーブ矢印 91"/>
           <p:cNvSpPr/>
           <p:nvPr/>
         </p:nvSpPr>
         <p:spPr>
-          <a:xfrm>
-            <a:off x="5575185" y="2177151"/>
-            <a:ext cx="1748039" cy="1759493"/>
-          </a:xfrm>
-          <a:prstGeom prst="rect">
-            <a:avLst/>
-          </a:prstGeom>
-          <a:noFill/>
+          <a:xfrm rot="17100000">
+            <a:off x="5393647" y="2636874"/>
+            <a:ext cx="1294661" cy="498126"/>
+          </a:xfrm>
+          <a:prstGeom prst="curvedDownArrow">
+            <a:avLst>
+              <a:gd name="adj1" fmla="val 40185"/>
+              <a:gd name="adj2" fmla="val 95231"/>
+              <a:gd name="adj3" fmla="val 36473"/>
+            </a:avLst>
+          </a:prstGeom>
+          <a:solidFill>
+            <a:srgbClr val="FFEEB9"/>
+          </a:solidFill>
           <a:ln>
-            <a:solidFill>
-              <a:schemeClr val="tx1"/>
-            </a:solidFill>
+            <a:noFill/>
           </a:ln>
         </p:spPr>
         <p:style>
@@ -4635,33 +4599,33 @@
           <a:lstStyle/>
           <a:p>
             <a:pPr algn="ctr"/>
-            <a:endParaRPr kumimoji="1" lang="ja-JP" altLang="en-US"/>
-          </a:p>
-        </p:txBody>
-      </p:sp>
-      <p:sp>
-        <p:nvSpPr>
-          <p:cNvPr id="91" name="下カーブ矢印 90"/>
+            <a:endParaRPr kumimoji="1" lang="ja-JP" altLang="en-US">
+              <a:solidFill>
+                <a:schemeClr val="tx1"/>
+              </a:solidFill>
+            </a:endParaRPr>
+          </a:p>
+        </p:txBody>
+      </p:sp>
+      <p:sp>
+        <p:nvSpPr>
+          <p:cNvPr id="84" name="正方形/長方形 83"/>
           <p:cNvSpPr/>
           <p:nvPr/>
         </p:nvSpPr>
         <p:spPr>
-          <a:xfrm rot="6300000">
-            <a:off x="6193100" y="2969933"/>
-            <a:ext cx="1294661" cy="498126"/>
-          </a:xfrm>
-          <a:prstGeom prst="curvedDownArrow">
-            <a:avLst>
-              <a:gd name="adj1" fmla="val 40185"/>
-              <a:gd name="adj2" fmla="val 95231"/>
-              <a:gd name="adj3" fmla="val 36473"/>
-            </a:avLst>
-          </a:prstGeom>
-          <a:solidFill>
-            <a:srgbClr val="FFEEB9"/>
-          </a:solidFill>
+          <a:xfrm>
+            <a:off x="7710931" y="2173119"/>
+            <a:ext cx="1748039" cy="1759493"/>
+          </a:xfrm>
+          <a:prstGeom prst="rect">
+            <a:avLst/>
+          </a:prstGeom>
+          <a:noFill/>
           <a:ln>
-            <a:noFill/>
+            <a:solidFill>
+              <a:schemeClr val="tx1"/>
+            </a:solidFill>
           </a:ln>
         </p:spPr>
         <p:style>
@@ -4685,34 +4649,28 @@
           <a:lstStyle/>
           <a:p>
             <a:pPr algn="ctr"/>
-            <a:endParaRPr kumimoji="1" lang="ja-JP" altLang="en-US">
-              <a:solidFill>
-                <a:schemeClr val="tx1"/>
-              </a:solidFill>
-            </a:endParaRPr>
-          </a:p>
-        </p:txBody>
-      </p:sp>
-      <p:sp>
-        <p:nvSpPr>
-          <p:cNvPr id="92" name="下カーブ矢印 91"/>
+            <a:endParaRPr kumimoji="1" lang="ja-JP" altLang="en-US"/>
+          </a:p>
+        </p:txBody>
+      </p:sp>
+      <p:sp>
+        <p:nvSpPr>
+          <p:cNvPr id="4" name="星 32 3"/>
           <p:cNvSpPr/>
           <p:nvPr/>
         </p:nvSpPr>
         <p:spPr>
-          <a:xfrm rot="17100000">
-            <a:off x="5393647" y="2636874"/>
-            <a:ext cx="1294661" cy="498126"/>
-          </a:xfrm>
-          <a:prstGeom prst="curvedDownArrow">
+          <a:xfrm>
+            <a:off x="7799958" y="2267873"/>
+            <a:ext cx="1569985" cy="1569985"/>
+          </a:xfrm>
+          <a:prstGeom prst="star32">
             <a:avLst>
-              <a:gd name="adj1" fmla="val 40185"/>
-              <a:gd name="adj2" fmla="val 95231"/>
-              <a:gd name="adj3" fmla="val 36473"/>
+              <a:gd name="adj" fmla="val 15352"/>
             </a:avLst>
           </a:prstGeom>
           <a:solidFill>
-            <a:srgbClr val="FFEEB9"/>
+            <a:srgbClr val="000000"/>
           </a:solidFill>
           <a:ln>
             <a:noFill/>
@@ -4739,108 +4697,34 @@
           <a:lstStyle/>
           <a:p>
             <a:pPr algn="ctr"/>
-            <a:endParaRPr kumimoji="1" lang="ja-JP" altLang="en-US">
-              <a:solidFill>
-                <a:schemeClr val="tx1"/>
-              </a:solidFill>
-            </a:endParaRPr>
-          </a:p>
-        </p:txBody>
-      </p:sp>
-      <p:sp>
-        <p:nvSpPr>
-          <p:cNvPr id="84" name="正方形/長方形 83"/>
-          <p:cNvSpPr/>
-          <p:nvPr/>
-        </p:nvSpPr>
+            <a:endParaRPr kumimoji="1" lang="ja-JP" altLang="en-US"/>
+          </a:p>
+        </p:txBody>
+      </p:sp>
+      <p:pic>
+        <p:nvPicPr>
+          <p:cNvPr id="22" name="図 21"/>
+          <p:cNvPicPr>
+            <a:picLocks noChangeAspect="1"/>
+          </p:cNvPicPr>
+          <p:nvPr/>
+        </p:nvPicPr>
+        <p:blipFill>
+          <a:blip r:embed="rId7"/>
+          <a:stretch>
+            <a:fillRect/>
+          </a:stretch>
+        </p:blipFill>
         <p:spPr>
           <a:xfrm>
-            <a:off x="7710931" y="2173119"/>
-            <a:ext cx="1748039" cy="1759493"/>
-          </a:xfrm>
-          <a:prstGeom prst="rect">
-            <a:avLst/>
-          </a:prstGeom>
-          <a:noFill/>
-          <a:ln>
-            <a:solidFill>
-              <a:schemeClr val="tx1"/>
-            </a:solidFill>
-          </a:ln>
-        </p:spPr>
-        <p:style>
-          <a:lnRef idx="2">
-            <a:schemeClr val="accent1">
-              <a:shade val="50000"/>
-            </a:schemeClr>
-          </a:lnRef>
-          <a:fillRef idx="1">
-            <a:schemeClr val="accent1"/>
-          </a:fillRef>
-          <a:effectRef idx="0">
-            <a:schemeClr val="accent1"/>
-          </a:effectRef>
-          <a:fontRef idx="minor">
-            <a:schemeClr val="lt1"/>
-          </a:fontRef>
-        </p:style>
-        <p:txBody>
-          <a:bodyPr rtlCol="0" anchor="ctr"/>
-          <a:lstStyle/>
-          <a:p>
-            <a:pPr algn="ctr"/>
-            <a:endParaRPr kumimoji="1" lang="ja-JP" altLang="en-US"/>
-          </a:p>
-        </p:txBody>
-      </p:sp>
-      <p:sp>
-        <p:nvSpPr>
-          <p:cNvPr id="4" name="星 32 3"/>
-          <p:cNvSpPr/>
-          <p:nvPr/>
-        </p:nvSpPr>
-        <p:spPr>
-          <a:xfrm>
-            <a:off x="7799958" y="2267873"/>
-            <a:ext cx="1569985" cy="1569985"/>
-          </a:xfrm>
-          <a:prstGeom prst="star32">
-            <a:avLst>
-              <a:gd name="adj" fmla="val 15352"/>
-            </a:avLst>
-          </a:prstGeom>
-          <a:solidFill>
-            <a:srgbClr val="000000"/>
-          </a:solidFill>
-          <a:ln>
-            <a:noFill/>
-          </a:ln>
-        </p:spPr>
-        <p:style>
-          <a:lnRef idx="2">
-            <a:schemeClr val="accent1">
-              <a:shade val="50000"/>
-            </a:schemeClr>
-          </a:lnRef>
-          <a:fillRef idx="1">
-            <a:schemeClr val="accent1"/>
-          </a:fillRef>
-          <a:effectRef idx="0">
-            <a:schemeClr val="accent1"/>
-          </a:effectRef>
-          <a:fontRef idx="minor">
-            <a:schemeClr val="lt1"/>
-          </a:fontRef>
-        </p:style>
-        <p:txBody>
-          <a:bodyPr rtlCol="0" anchor="ctr"/>
-          <a:lstStyle/>
-          <a:p>
-            <a:pPr algn="ctr"/>
-            <a:endParaRPr kumimoji="1" lang="ja-JP" altLang="en-US"/>
-          </a:p>
-        </p:txBody>
-      </p:sp>
+            <a:off x="4813424" y="4304610"/>
+            <a:ext cx="385200" cy="251181"/>
+          </a:xfrm>
+          <a:prstGeom prst="rect">
+            <a:avLst/>
+          </a:prstGeom>
+        </p:spPr>
+      </p:pic>
     </p:spTree>
     <p:extLst>
       <p:ext uri="{BB962C8B-B14F-4D97-AF65-F5344CB8AC3E}">
